--- a/Presentation.pptx
+++ b/Presentation.pptx
@@ -5,7 +5,7 @@
     <p:sldMasterId id="2147483648" r:id="rId1"/>
   </p:sldMasterIdLst>
   <p:notesMasterIdLst>
-    <p:notesMasterId r:id="rId19"/>
+    <p:notesMasterId r:id="rId20"/>
   </p:notesMasterIdLst>
   <p:sldIdLst>
     <p:sldId id="256" r:id="rId2"/>
@@ -17,7 +17,7 @@
     <p:sldId id="273" r:id="rId8"/>
     <p:sldId id="274" r:id="rId9"/>
     <p:sldId id="275" r:id="rId10"/>
-    <p:sldId id="277" r:id="rId11"/>
+    <p:sldId id="287" r:id="rId11"/>
     <p:sldId id="286" r:id="rId12"/>
     <p:sldId id="276" r:id="rId13"/>
     <p:sldId id="278" r:id="rId14"/>
@@ -25,6 +25,7 @@
     <p:sldId id="284" r:id="rId16"/>
     <p:sldId id="282" r:id="rId17"/>
     <p:sldId id="285" r:id="rId18"/>
+    <p:sldId id="288" r:id="rId19"/>
   </p:sldIdLst>
   <p:sldSz cx="12192000" cy="6858000"/>
   <p:notesSz cx="6858000" cy="9144000"/>
@@ -213,7 +214,7 @@
           <a:p>
             <a:fld id="{08B0D8E6-5581-894E-98DB-644FEC3EB881}" type="datetimeFigureOut">
               <a:rPr lang="en-MT" smtClean="0"/>
-              <a:t>26/10/2025</a:t>
+              <a:t>27/10/2025</a:t>
             </a:fld>
             <a:endParaRPr lang="en-MT"/>
           </a:p>
@@ -906,7 +907,7 @@
           <a:p>
             <a:fld id="{72148EC3-A719-4A4D-9337-3FD5D00AB7D5}" type="datetimeFigureOut">
               <a:rPr lang="en-MT" smtClean="0"/>
-              <a:t>26/10/2025</a:t>
+              <a:t>27/10/2025</a:t>
             </a:fld>
             <a:endParaRPr lang="en-MT"/>
           </a:p>
@@ -1106,7 +1107,7 @@
           <a:p>
             <a:fld id="{72148EC3-A719-4A4D-9337-3FD5D00AB7D5}" type="datetimeFigureOut">
               <a:rPr lang="en-MT" smtClean="0"/>
-              <a:t>26/10/2025</a:t>
+              <a:t>27/10/2025</a:t>
             </a:fld>
             <a:endParaRPr lang="en-MT"/>
           </a:p>
@@ -1316,7 +1317,7 @@
           <a:p>
             <a:fld id="{72148EC3-A719-4A4D-9337-3FD5D00AB7D5}" type="datetimeFigureOut">
               <a:rPr lang="en-MT" smtClean="0"/>
-              <a:t>26/10/2025</a:t>
+              <a:t>27/10/2025</a:t>
             </a:fld>
             <a:endParaRPr lang="en-MT"/>
           </a:p>
@@ -1516,7 +1517,7 @@
           <a:p>
             <a:fld id="{72148EC3-A719-4A4D-9337-3FD5D00AB7D5}" type="datetimeFigureOut">
               <a:rPr lang="en-MT" smtClean="0"/>
-              <a:t>26/10/2025</a:t>
+              <a:t>27/10/2025</a:t>
             </a:fld>
             <a:endParaRPr lang="en-MT"/>
           </a:p>
@@ -1792,7 +1793,7 @@
           <a:p>
             <a:fld id="{72148EC3-A719-4A4D-9337-3FD5D00AB7D5}" type="datetimeFigureOut">
               <a:rPr lang="en-MT" smtClean="0"/>
-              <a:t>26/10/2025</a:t>
+              <a:t>27/10/2025</a:t>
             </a:fld>
             <a:endParaRPr lang="en-MT"/>
           </a:p>
@@ -2060,7 +2061,7 @@
           <a:p>
             <a:fld id="{72148EC3-A719-4A4D-9337-3FD5D00AB7D5}" type="datetimeFigureOut">
               <a:rPr lang="en-MT" smtClean="0"/>
-              <a:t>26/10/2025</a:t>
+              <a:t>27/10/2025</a:t>
             </a:fld>
             <a:endParaRPr lang="en-MT"/>
           </a:p>
@@ -2475,7 +2476,7 @@
           <a:p>
             <a:fld id="{72148EC3-A719-4A4D-9337-3FD5D00AB7D5}" type="datetimeFigureOut">
               <a:rPr lang="en-MT" smtClean="0"/>
-              <a:t>26/10/2025</a:t>
+              <a:t>27/10/2025</a:t>
             </a:fld>
             <a:endParaRPr lang="en-MT"/>
           </a:p>
@@ -2617,7 +2618,7 @@
           <a:p>
             <a:fld id="{72148EC3-A719-4A4D-9337-3FD5D00AB7D5}" type="datetimeFigureOut">
               <a:rPr lang="en-MT" smtClean="0"/>
-              <a:t>26/10/2025</a:t>
+              <a:t>27/10/2025</a:t>
             </a:fld>
             <a:endParaRPr lang="en-MT"/>
           </a:p>
@@ -2730,7 +2731,7 @@
           <a:p>
             <a:fld id="{72148EC3-A719-4A4D-9337-3FD5D00AB7D5}" type="datetimeFigureOut">
               <a:rPr lang="en-MT" smtClean="0"/>
-              <a:t>26/10/2025</a:t>
+              <a:t>27/10/2025</a:t>
             </a:fld>
             <a:endParaRPr lang="en-MT"/>
           </a:p>
@@ -3043,7 +3044,7 @@
           <a:p>
             <a:fld id="{72148EC3-A719-4A4D-9337-3FD5D00AB7D5}" type="datetimeFigureOut">
               <a:rPr lang="en-MT" smtClean="0"/>
-              <a:t>26/10/2025</a:t>
+              <a:t>27/10/2025</a:t>
             </a:fld>
             <a:endParaRPr lang="en-MT"/>
           </a:p>
@@ -3332,7 +3333,7 @@
           <a:p>
             <a:fld id="{72148EC3-A719-4A4D-9337-3FD5D00AB7D5}" type="datetimeFigureOut">
               <a:rPr lang="en-MT" smtClean="0"/>
-              <a:t>26/10/2025</a:t>
+              <a:t>27/10/2025</a:t>
             </a:fld>
             <a:endParaRPr lang="en-MT"/>
           </a:p>
@@ -3578,7 +3579,7 @@
           <a:p>
             <a:fld id="{72148EC3-A719-4A4D-9337-3FD5D00AB7D5}" type="datetimeFigureOut">
               <a:rPr lang="en-MT" smtClean="0"/>
-              <a:t>26/10/2025</a:t>
+              <a:t>27/10/2025</a:t>
             </a:fld>
             <a:endParaRPr lang="en-MT"/>
           </a:p>
@@ -4072,7 +4073,7 @@
         <p:cNvPr id="1" name="">
           <a:extLst>
             <a:ext uri="{FF2B5EF4-FFF2-40B4-BE49-F238E27FC236}">
-              <a16:creationId xmlns:a16="http://schemas.microsoft.com/office/drawing/2014/main" id="{049F776C-A7A6-BE7C-2050-F4A773DC1955}"/>
+              <a16:creationId xmlns:a16="http://schemas.microsoft.com/office/drawing/2014/main" id="{7F7126F6-A881-AA51-4DA8-434019B493B2}"/>
             </a:ext>
           </a:extLst>
         </p:cNvPr>
@@ -4092,7 +4093,7 @@
           <p:cNvPr id="2" name="Title 1">
             <a:extLst>
               <a:ext uri="{FF2B5EF4-FFF2-40B4-BE49-F238E27FC236}">
-                <a16:creationId xmlns:a16="http://schemas.microsoft.com/office/drawing/2014/main" id="{B493D680-79E8-20F9-8B7B-9954EEEB8259}"/>
+                <a16:creationId xmlns:a16="http://schemas.microsoft.com/office/drawing/2014/main" id="{D50A9B11-98B1-8263-BDEF-DD37DCB47044}"/>
               </a:ext>
             </a:extLst>
           </p:cNvPr>
@@ -4124,10 +4125,10 @@
       </p:sp>
       <p:sp>
         <p:nvSpPr>
-          <p:cNvPr id="14" name="TextBox 13">
-            <a:extLst>
-              <a:ext uri="{FF2B5EF4-FFF2-40B4-BE49-F238E27FC236}">
-                <a16:creationId xmlns:a16="http://schemas.microsoft.com/office/drawing/2014/main" id="{7C7A130F-A3FB-1049-7433-FB82FE4253EA}"/>
+          <p:cNvPr id="13" name="TextBox 12">
+            <a:extLst>
+              <a:ext uri="{FF2B5EF4-FFF2-40B4-BE49-F238E27FC236}">
+                <a16:creationId xmlns:a16="http://schemas.microsoft.com/office/drawing/2014/main" id="{F0D84D8A-7780-A3DC-B013-821047FB9308}"/>
               </a:ext>
             </a:extLst>
           </p:cNvPr>
@@ -4136,8 +4137,8 @@
         </p:nvSpPr>
         <p:spPr>
           <a:xfrm>
-            <a:off x="6389370" y="1931670"/>
-            <a:ext cx="4834890" cy="4801314"/>
+            <a:off x="205740" y="6057900"/>
+            <a:ext cx="11148060" cy="646331"/>
           </a:xfrm>
           <a:prstGeom prst="rect">
             <a:avLst/>
@@ -4152,8 +4153,50 @@
           <a:p>
             <a:r>
               <a:rPr lang="en-MT" dirty="0"/>
-              <a:t>Stock options drive attrition in unexpected ways:</a:t>
-            </a:r>
+              <a:t>*Redsiduals were computed from a linear model. </a:t>
+            </a:r>
+          </a:p>
+          <a:p>
+            <a:r>
+              <a:rPr lang="en-MT" dirty="0"/>
+              <a:t>Expected income is a function of ”Department”, “Job Level”, and “Years Since Last Promotion”.</a:t>
+            </a:r>
+          </a:p>
+        </p:txBody>
+      </p:sp>
+      <p:sp>
+        <p:nvSpPr>
+          <p:cNvPr id="14" name="TextBox 13">
+            <a:extLst>
+              <a:ext uri="{FF2B5EF4-FFF2-40B4-BE49-F238E27FC236}">
+                <a16:creationId xmlns:a16="http://schemas.microsoft.com/office/drawing/2014/main" id="{CA220FF0-71C0-04FC-420D-0FD2361A224D}"/>
+              </a:ext>
+            </a:extLst>
+          </p:cNvPr>
+          <p:cNvSpPr txBox="1"/>
+          <p:nvPr/>
+        </p:nvSpPr>
+        <p:spPr>
+          <a:xfrm>
+            <a:off x="6389370" y="1931670"/>
+            <a:ext cx="4834890" cy="3416320"/>
+          </a:xfrm>
+          <a:prstGeom prst="rect">
+            <a:avLst/>
+          </a:prstGeom>
+          <a:noFill/>
+        </p:spPr>
+        <p:txBody>
+          <a:bodyPr wrap="square" rtlCol="0">
+            <a:spAutoFit/>
+          </a:bodyPr>
+          <a:lstStyle/>
+          <a:p>
+            <a:r>
+              <a:rPr lang="en-US" dirty="0"/>
+              <a:t>When accounting for residuals, the evidence suggests that income is a significant driver of attrition.</a:t>
+            </a:r>
+            <a:endParaRPr lang="en-MT" dirty="0"/>
           </a:p>
           <a:p>
             <a:endParaRPr lang="en-MT" dirty="0"/>
@@ -4165,7 +4208,7 @@
                   <a:srgbClr val="C00000"/>
                 </a:solidFill>
               </a:rPr>
-              <a:t>Low Stock Options:</a:t>
+              <a:t>Below Expected Income</a:t>
             </a:r>
           </a:p>
           <a:p>
@@ -4174,12 +4217,8 @@
               <a:buChar char="•"/>
             </a:pPr>
             <a:r>
-              <a:rPr lang="en-GB" dirty="0"/>
-              <a:t>D</a:t>
-            </a:r>
-            <a:r>
               <a:rPr lang="en-MT" dirty="0"/>
-              <a:t>rive attrtion across all levels</a:t>
+              <a:t>The Attrition rate is higher across all job levels</a:t>
             </a:r>
           </a:p>
           <a:p>
@@ -4187,25 +4226,6 @@
               <a:buFont typeface="Arial" panose="020B0604020202020204" pitchFamily="34" charset="0"/>
               <a:buChar char="•"/>
             </a:pPr>
-            <a:endParaRPr lang="en-MT" dirty="0"/>
-          </a:p>
-          <a:p>
-            <a:r>
-              <a:rPr lang="en-MT" dirty="0"/>
-              <a:t>Low and Medium Stock Options:</a:t>
-            </a:r>
-          </a:p>
-          <a:p>
-            <a:pPr marL="285750" indent="-285750">
-              <a:buFont typeface="Arial" panose="020B0604020202020204" pitchFamily="34" charset="0"/>
-              <a:buChar char="•"/>
-            </a:pPr>
-            <a:r>
-              <a:rPr lang="en-MT" dirty="0"/>
-              <a:t>Seems to moderate attriton</a:t>
-            </a:r>
-          </a:p>
-          <a:p>
             <a:endParaRPr lang="en-MT" dirty="0"/>
           </a:p>
           <a:p>
@@ -4217,8 +4237,9 @@
                   </a:schemeClr>
                 </a:solidFill>
               </a:rPr>
-              <a:t>High Stock Options:</a:t>
-            </a:r>
+              <a:t>Above Expected Income</a:t>
+            </a:r>
+            <a:endParaRPr lang="en-MT" dirty="0"/>
           </a:p>
           <a:p>
             <a:pPr marL="285750" indent="-285750">
@@ -4227,29 +4248,27 @@
             </a:pPr>
             <a:r>
               <a:rPr lang="en-MT" dirty="0"/>
-              <a:t>Unexpectadly seems to drive attrition, especially among senior level and highly paid entry level employees.</a:t>
-            </a:r>
-          </a:p>
-          <a:p>
-            <a:endParaRPr lang="en-MT" dirty="0"/>
-          </a:p>
-          <a:p>
-            <a:endParaRPr lang="en-MT" dirty="0"/>
-          </a:p>
-          <a:p>
-            <a:endParaRPr lang="en-MT" dirty="0"/>
-          </a:p>
-          <a:p>
-            <a:endParaRPr lang="en-MT" dirty="0"/>
+              <a:t>Attrition rate is lower for Mid and Senior</a:t>
+            </a:r>
+          </a:p>
+          <a:p>
+            <a:pPr marL="285750" indent="-285750">
+              <a:buFont typeface="Arial" panose="020B0604020202020204" pitchFamily="34" charset="0"/>
+              <a:buChar char="•"/>
+            </a:pPr>
+            <a:r>
+              <a:rPr lang="en-MT" dirty="0"/>
+              <a:t>Attrition rate is comparable to “Around Expected” for Entry and Junior</a:t>
+            </a:r>
           </a:p>
         </p:txBody>
       </p:sp>
       <p:pic>
         <p:nvPicPr>
-          <p:cNvPr id="5" name="Content Placeholder 4" descr="A screenshot of a graph&#10;&#10;AI-generated content may be incorrect.">
-            <a:extLst>
-              <a:ext uri="{FF2B5EF4-FFF2-40B4-BE49-F238E27FC236}">
-                <a16:creationId xmlns:a16="http://schemas.microsoft.com/office/drawing/2014/main" id="{035D085A-A4B7-FFE6-09B6-783EA8D08E6C}"/>
+          <p:cNvPr id="4" name="Picture 3" descr="A graph with numbers and a bar chart&#10;&#10;AI-generated content may be incorrect.">
+            <a:extLst>
+              <a:ext uri="{FF2B5EF4-FFF2-40B4-BE49-F238E27FC236}">
+                <a16:creationId xmlns:a16="http://schemas.microsoft.com/office/drawing/2014/main" id="{21A3EB00-2944-D4EB-CA4B-5F8341E2EE06}"/>
               </a:ext>
             </a:extLst>
           </p:cNvPr>
@@ -4266,8 +4285,8 @@
         </p:blipFill>
         <p:spPr>
           <a:xfrm>
-            <a:off x="-1" y="153768"/>
-            <a:ext cx="6292752" cy="6292752"/>
+            <a:off x="501189" y="421574"/>
+            <a:ext cx="5278581" cy="5278581"/>
           </a:xfrm>
           <a:prstGeom prst="rect">
             <a:avLst/>
@@ -4276,10 +4295,10 @@
       </p:pic>
       <p:sp>
         <p:nvSpPr>
-          <p:cNvPr id="8" name="Rectangle 7">
-            <a:extLst>
-              <a:ext uri="{FF2B5EF4-FFF2-40B4-BE49-F238E27FC236}">
-                <a16:creationId xmlns:a16="http://schemas.microsoft.com/office/drawing/2014/main" id="{5A7410F8-F8DE-D84F-333E-318562FB6748}"/>
+          <p:cNvPr id="5" name="Rectangle 4">
+            <a:extLst>
+              <a:ext uri="{FF2B5EF4-FFF2-40B4-BE49-F238E27FC236}">
+                <a16:creationId xmlns:a16="http://schemas.microsoft.com/office/drawing/2014/main" id="{DC2FC630-83EE-570C-65BF-37FB5855FFC0}"/>
               </a:ext>
             </a:extLst>
           </p:cNvPr>
@@ -4288,8 +4307,8 @@
         </p:nvSpPr>
         <p:spPr>
           <a:xfrm>
-            <a:off x="1071424" y="540327"/>
-            <a:ext cx="1184888" cy="2030681"/>
+            <a:off x="1588000" y="1558635"/>
+            <a:ext cx="1226451" cy="3004457"/>
           </a:xfrm>
           <a:prstGeom prst="rect">
             <a:avLst/>
@@ -4329,10 +4348,10 @@
       </p:sp>
       <p:sp>
         <p:nvSpPr>
-          <p:cNvPr id="9" name="Rectangle 8">
-            <a:extLst>
-              <a:ext uri="{FF2B5EF4-FFF2-40B4-BE49-F238E27FC236}">
-                <a16:creationId xmlns:a16="http://schemas.microsoft.com/office/drawing/2014/main" id="{A3D9F068-2ECB-B8E1-1E59-65058E80BFFC}"/>
+          <p:cNvPr id="6" name="Rectangle 5">
+            <a:extLst>
+              <a:ext uri="{FF2B5EF4-FFF2-40B4-BE49-F238E27FC236}">
+                <a16:creationId xmlns:a16="http://schemas.microsoft.com/office/drawing/2014/main" id="{F064B41B-CC80-D0B9-F371-4B62C9A260D2}"/>
               </a:ext>
             </a:extLst>
           </p:cNvPr>
@@ -4341,8 +4360,8 @@
         </p:nvSpPr>
         <p:spPr>
           <a:xfrm>
-            <a:off x="4761838" y="540326"/>
-            <a:ext cx="1184888" cy="2030681"/>
+            <a:off x="2900360" y="1594261"/>
+            <a:ext cx="2603853" cy="1428009"/>
           </a:xfrm>
           <a:prstGeom prst="rect">
             <a:avLst/>
@@ -4382,10 +4401,10 @@
       </p:sp>
       <p:sp>
         <p:nvSpPr>
-          <p:cNvPr id="10" name="Rectangle 9">
-            <a:extLst>
-              <a:ext uri="{FF2B5EF4-FFF2-40B4-BE49-F238E27FC236}">
-                <a16:creationId xmlns:a16="http://schemas.microsoft.com/office/drawing/2014/main" id="{9DE822D0-EF11-C63D-DA9B-E8EA8CC2241F}"/>
+          <p:cNvPr id="7" name="Rectangle 6">
+            <a:extLst>
+              <a:ext uri="{FF2B5EF4-FFF2-40B4-BE49-F238E27FC236}">
+                <a16:creationId xmlns:a16="http://schemas.microsoft.com/office/drawing/2014/main" id="{22297B9C-269A-2034-C3A6-79B0E77BBA11}"/>
               </a:ext>
             </a:extLst>
           </p:cNvPr>
@@ -4394,8 +4413,8 @@
         </p:nvSpPr>
         <p:spPr>
           <a:xfrm>
-            <a:off x="4803402" y="5052951"/>
-            <a:ext cx="1184888" cy="668975"/>
+            <a:off x="2900360" y="3060864"/>
+            <a:ext cx="2603853" cy="1428009"/>
           </a:xfrm>
           <a:prstGeom prst="rect">
             <a:avLst/>
@@ -4433,48 +4452,13 @@
           </a:p>
         </p:txBody>
       </p:sp>
-      <p:sp>
-        <p:nvSpPr>
-          <p:cNvPr id="3" name="TextBox 2">
-            <a:extLst>
-              <a:ext uri="{FF2B5EF4-FFF2-40B4-BE49-F238E27FC236}">
-                <a16:creationId xmlns:a16="http://schemas.microsoft.com/office/drawing/2014/main" id="{8B238CFF-28D8-9B9F-03D2-63BF042450F3}"/>
-              </a:ext>
-            </a:extLst>
-          </p:cNvPr>
-          <p:cNvSpPr txBox="1"/>
-          <p:nvPr/>
-        </p:nvSpPr>
-        <p:spPr>
-          <a:xfrm>
-            <a:off x="4835726" y="6014852"/>
-            <a:ext cx="1120239" cy="369332"/>
-          </a:xfrm>
-          <a:prstGeom prst="rect">
-            <a:avLst/>
-          </a:prstGeom>
-          <a:noFill/>
-        </p:spPr>
-        <p:txBody>
-          <a:bodyPr wrap="square" rtlCol="0">
-            <a:spAutoFit/>
-          </a:bodyPr>
-          <a:lstStyle/>
-          <a:p>
-            <a:r>
-              <a:rPr lang="en-MT" dirty="0"/>
-              <a:t>3 out of 5</a:t>
-            </a:r>
-          </a:p>
-        </p:txBody>
-      </p:sp>
     </p:spTree>
     <p:custDataLst>
       <p:tags r:id="rId1"/>
     </p:custDataLst>
     <p:extLst>
       <p:ext uri="{BB962C8B-B14F-4D97-AF65-F5344CB8AC3E}">
-        <p14:creationId xmlns:p14="http://schemas.microsoft.com/office/powerpoint/2010/main" val="256932282"/>
+        <p14:creationId xmlns:p14="http://schemas.microsoft.com/office/powerpoint/2010/main" val="3203871898"/>
       </p:ext>
     </p:extLst>
   </p:cSld>
@@ -4502,7 +4486,7 @@
                             </p:stCondLst>
                             <p:childTnLst>
                               <p:par>
-                                <p:cTn id="5" presetID="1" presetClass="entr" presetSubtype="0" fill="hold" nodeType="clickEffect">
+                                <p:cTn id="5" presetID="1" presetClass="entr" presetSubtype="0" fill="hold" grpId="0" nodeType="clickEffect">
                                   <p:stCondLst>
                                     <p:cond delay="0"/>
                                   </p:stCondLst>
@@ -4515,11 +4499,7 @@
                                           </p:stCondLst>
                                         </p:cTn>
                                         <p:tgtEl>
-                                          <p:spTgt spid="14">
-                                            <p:txEl>
-                                              <p:pRg st="2" end="2"/>
-                                            </p:txEl>
-                                          </p:spTgt>
+                                          <p:spTgt spid="5"/>
                                         </p:tgtEl>
                                         <p:attrNameLst>
                                           <p:attrName>style.visibility</p:attrName>
@@ -4563,39 +4543,26 @@
                                   </p:childTnLst>
                                 </p:cTn>
                               </p:par>
+                            </p:childTnLst>
+                          </p:cTn>
+                        </p:par>
+                      </p:childTnLst>
+                    </p:cTn>
+                  </p:par>
+                  <p:par>
+                    <p:cTn id="9" fill="hold">
+                      <p:stCondLst>
+                        <p:cond delay="indefinite"/>
+                      </p:stCondLst>
+                      <p:childTnLst>
+                        <p:par>
+                          <p:cTn id="10" fill="hold">
+                            <p:stCondLst>
+                              <p:cond delay="0"/>
+                            </p:stCondLst>
+                            <p:childTnLst>
                               <p:par>
-                                <p:cTn id="9" presetID="1" presetClass="entr" presetSubtype="0" fill="hold" nodeType="withEffect">
-                                  <p:stCondLst>
-                                    <p:cond delay="0"/>
-                                  </p:stCondLst>
-                                  <p:childTnLst>
-                                    <p:set>
-                                      <p:cBhvr>
-                                        <p:cTn id="10" dur="1" fill="hold">
-                                          <p:stCondLst>
-                                            <p:cond delay="0"/>
-                                          </p:stCondLst>
-                                        </p:cTn>
-                                        <p:tgtEl>
-                                          <p:spTgt spid="14">
-                                            <p:txEl>
-                                              <p:pRg st="5" end="5"/>
-                                            </p:txEl>
-                                          </p:spTgt>
-                                        </p:tgtEl>
-                                        <p:attrNameLst>
-                                          <p:attrName>style.visibility</p:attrName>
-                                        </p:attrNameLst>
-                                      </p:cBhvr>
-                                      <p:to>
-                                        <p:strVal val="visible"/>
-                                      </p:to>
-                                    </p:set>
-                                  </p:childTnLst>
-                                </p:cTn>
-                              </p:par>
-                              <p:par>
-                                <p:cTn id="11" presetID="1" presetClass="entr" presetSubtype="0" fill="hold" nodeType="withEffect">
+                                <p:cTn id="11" presetID="1" presetClass="exit" presetSubtype="0" fill="hold" grpId="1" nodeType="clickEffect">
                                   <p:stCondLst>
                                     <p:cond delay="0"/>
                                   </p:stCondLst>
@@ -4603,6 +4570,33 @@
                                     <p:set>
                                       <p:cBhvr>
                                         <p:cTn id="12" dur="1" fill="hold">
+                                          <p:stCondLst>
+                                            <p:cond delay="0"/>
+                                          </p:stCondLst>
+                                        </p:cTn>
+                                        <p:tgtEl>
+                                          <p:spTgt spid="5"/>
+                                        </p:tgtEl>
+                                        <p:attrNameLst>
+                                          <p:attrName>style.visibility</p:attrName>
+                                        </p:attrNameLst>
+                                      </p:cBhvr>
+                                      <p:to>
+                                        <p:strVal val="hidden"/>
+                                      </p:to>
+                                    </p:set>
+                                  </p:childTnLst>
+                                </p:cTn>
+                              </p:par>
+                              <p:par>
+                                <p:cTn id="13" presetID="1" presetClass="entr" presetSubtype="0" fill="hold" nodeType="withEffect">
+                                  <p:stCondLst>
+                                    <p:cond delay="0"/>
+                                  </p:stCondLst>
+                                  <p:childTnLst>
+                                    <p:set>
+                                      <p:cBhvr>
+                                        <p:cTn id="14" dur="1" fill="hold">
                                           <p:stCondLst>
                                             <p:cond delay="0"/>
                                           </p:stCondLst>
@@ -4626,20 +4620,20 @@
                                 </p:cTn>
                               </p:par>
                               <p:par>
-                                <p:cTn id="13" presetID="1" presetClass="entr" presetSubtype="0" fill="hold" grpId="0" nodeType="withEffect">
+                                <p:cTn id="15" presetID="1" presetClass="entr" presetSubtype="0" fill="hold" grpId="1" nodeType="withEffect">
                                   <p:stCondLst>
                                     <p:cond delay="0"/>
                                   </p:stCondLst>
                                   <p:childTnLst>
                                     <p:set>
                                       <p:cBhvr>
-                                        <p:cTn id="14" dur="1" fill="hold">
+                                        <p:cTn id="16" dur="1" fill="hold">
                                           <p:stCondLst>
                                             <p:cond delay="0"/>
                                           </p:stCondLst>
                                         </p:cTn>
                                         <p:tgtEl>
-                                          <p:spTgt spid="8"/>
+                                          <p:spTgt spid="6"/>
                                         </p:tgtEl>
                                         <p:attrNameLst>
                                           <p:attrName>style.visibility</p:attrName>
@@ -4659,36 +4653,59 @@
                     </p:cTn>
                   </p:par>
                   <p:par>
-                    <p:cTn id="15" fill="hold">
+                    <p:cTn id="17" fill="hold">
                       <p:stCondLst>
                         <p:cond delay="indefinite"/>
                       </p:stCondLst>
                       <p:childTnLst>
                         <p:par>
-                          <p:cTn id="16" fill="hold">
+                          <p:cTn id="18" fill="hold">
                             <p:stCondLst>
                               <p:cond delay="0"/>
                             </p:stCondLst>
                             <p:childTnLst>
                               <p:par>
-                                <p:cTn id="17" presetID="1" presetClass="entr" presetSubtype="0" fill="hold" nodeType="clickEffect">
+                                <p:cTn id="19" presetID="1" presetClass="exit" presetSubtype="0" fill="hold" grpId="2" nodeType="clickEffect">
                                   <p:stCondLst>
                                     <p:cond delay="0"/>
                                   </p:stCondLst>
                                   <p:childTnLst>
                                     <p:set>
                                       <p:cBhvr>
-                                        <p:cTn id="18" dur="1" fill="hold">
+                                        <p:cTn id="20" dur="1" fill="hold">
                                           <p:stCondLst>
                                             <p:cond delay="0"/>
                                           </p:stCondLst>
                                         </p:cTn>
                                         <p:tgtEl>
-                                          <p:spTgt spid="14">
-                                            <p:txEl>
-                                              <p:pRg st="8" end="8"/>
-                                            </p:txEl>
-                                          </p:spTgt>
+                                          <p:spTgt spid="6"/>
+                                        </p:tgtEl>
+                                        <p:attrNameLst>
+                                          <p:attrName>style.visibility</p:attrName>
+                                        </p:attrNameLst>
+                                      </p:cBhvr>
+                                      <p:to>
+                                        <p:strVal val="hidden"/>
+                                      </p:to>
+                                    </p:set>
+                                  </p:childTnLst>
+                                </p:cTn>
+                              </p:par>
+                              <p:par>
+                                <p:cTn id="21" presetID="1" presetClass="entr" presetSubtype="0" fill="hold" grpId="0" nodeType="withEffect">
+                                  <p:stCondLst>
+                                    <p:cond delay="0"/>
+                                  </p:stCondLst>
+                                  <p:childTnLst>
+                                    <p:set>
+                                      <p:cBhvr>
+                                        <p:cTn id="22" dur="1" fill="hold">
+                                          <p:stCondLst>
+                                            <p:cond delay="0"/>
+                                          </p:stCondLst>
+                                        </p:cTn>
+                                        <p:tgtEl>
+                                          <p:spTgt spid="7"/>
                                         </p:tgtEl>
                                         <p:attrNameLst>
                                           <p:attrName>style.visibility</p:attrName>
@@ -4702,65 +4719,7 @@
                                 </p:cTn>
                               </p:par>
                               <p:par>
-                                <p:cTn id="19" presetID="1" presetClass="entr" presetSubtype="0" fill="hold" nodeType="withEffect">
-                                  <p:stCondLst>
-                                    <p:cond delay="0"/>
-                                  </p:stCondLst>
-                                  <p:childTnLst>
-                                    <p:set>
-                                      <p:cBhvr>
-                                        <p:cTn id="20" dur="1" fill="hold">
-                                          <p:stCondLst>
-                                            <p:cond delay="0"/>
-                                          </p:stCondLst>
-                                        </p:cTn>
-                                        <p:tgtEl>
-                                          <p:spTgt spid="14">
-                                            <p:txEl>
-                                              <p:pRg st="9" end="9"/>
-                                            </p:txEl>
-                                          </p:spTgt>
-                                        </p:tgtEl>
-                                        <p:attrNameLst>
-                                          <p:attrName>style.visibility</p:attrName>
-                                        </p:attrNameLst>
-                                      </p:cBhvr>
-                                      <p:to>
-                                        <p:strVal val="visible"/>
-                                      </p:to>
-                                    </p:set>
-                                  </p:childTnLst>
-                                </p:cTn>
-                              </p:par>
-                              <p:par>
-                                <p:cTn id="21" presetID="1" presetClass="exit" presetSubtype="0" fill="hold" grpId="1" nodeType="withEffect">
-                                  <p:stCondLst>
-                                    <p:cond delay="0"/>
-                                  </p:stCondLst>
-                                  <p:childTnLst>
-                                    <p:set>
-                                      <p:cBhvr>
-                                        <p:cTn id="22" dur="1" fill="hold">
-                                          <p:stCondLst>
-                                            <p:cond delay="0"/>
-                                          </p:stCondLst>
-                                        </p:cTn>
-                                        <p:tgtEl>
-                                          <p:spTgt spid="8"/>
-                                        </p:tgtEl>
-                                        <p:attrNameLst>
-                                          <p:attrName>style.visibility</p:attrName>
-                                        </p:attrNameLst>
-                                      </p:cBhvr>
-                                      <p:to>
-                                        <p:strVal val="hidden"/>
-                                      </p:to>
-                                    </p:set>
-                                  </p:childTnLst>
-                                </p:cTn>
-                              </p:par>
-                              <p:par>
-                                <p:cTn id="23" presetID="1" presetClass="entr" presetSubtype="0" fill="hold" grpId="0" nodeType="withEffect">
+                                <p:cTn id="23" presetID="1" presetClass="entr" presetSubtype="0" fill="hold" nodeType="withEffect">
                                   <p:stCondLst>
                                     <p:cond delay="0"/>
                                   </p:stCondLst>
@@ -4773,106 +4732,11 @@
                                           </p:stCondLst>
                                         </p:cTn>
                                         <p:tgtEl>
-                                          <p:spTgt spid="9"/>
-                                        </p:tgtEl>
-                                        <p:attrNameLst>
-                                          <p:attrName>style.visibility</p:attrName>
-                                        </p:attrNameLst>
-                                      </p:cBhvr>
-                                      <p:to>
-                                        <p:strVal val="visible"/>
-                                      </p:to>
-                                    </p:set>
-                                  </p:childTnLst>
-                                </p:cTn>
-                              </p:par>
-                            </p:childTnLst>
-                          </p:cTn>
-                        </p:par>
-                      </p:childTnLst>
-                    </p:cTn>
-                  </p:par>
-                  <p:par>
-                    <p:cTn id="25" fill="hold">
-                      <p:stCondLst>
-                        <p:cond delay="indefinite"/>
-                      </p:stCondLst>
-                      <p:childTnLst>
-                        <p:par>
-                          <p:cTn id="26" fill="hold">
-                            <p:stCondLst>
-                              <p:cond delay="0"/>
-                            </p:stCondLst>
-                            <p:childTnLst>
-                              <p:par>
-                                <p:cTn id="27" presetID="1" presetClass="entr" presetSubtype="0" fill="hold" grpId="0" nodeType="clickEffect">
-                                  <p:stCondLst>
-                                    <p:cond delay="0"/>
-                                  </p:stCondLst>
-                                  <p:childTnLst>
-                                    <p:set>
-                                      <p:cBhvr>
-                                        <p:cTn id="28" dur="1" fill="hold">
-                                          <p:stCondLst>
-                                            <p:cond delay="0"/>
-                                          </p:stCondLst>
-                                        </p:cTn>
-                                        <p:tgtEl>
-                                          <p:spTgt spid="10"/>
-                                        </p:tgtEl>
-                                        <p:attrNameLst>
-                                          <p:attrName>style.visibility</p:attrName>
-                                        </p:attrNameLst>
-                                      </p:cBhvr>
-                                      <p:to>
-                                        <p:strVal val="visible"/>
-                                      </p:to>
-                                    </p:set>
-                                  </p:childTnLst>
-                                </p:cTn>
-                              </p:par>
-                              <p:par>
-                                <p:cTn id="29" presetID="1" presetClass="exit" presetSubtype="0" fill="hold" grpId="1" nodeType="withEffect">
-                                  <p:stCondLst>
-                                    <p:cond delay="0"/>
-                                  </p:stCondLst>
-                                  <p:childTnLst>
-                                    <p:set>
-                                      <p:cBhvr>
-                                        <p:cTn id="30" dur="1" fill="hold">
-                                          <p:stCondLst>
-                                            <p:cond delay="0"/>
-                                          </p:stCondLst>
-                                        </p:cTn>
-                                        <p:tgtEl>
-                                          <p:spTgt spid="9"/>
-                                        </p:tgtEl>
-                                        <p:attrNameLst>
-                                          <p:attrName>style.visibility</p:attrName>
-                                        </p:attrNameLst>
-                                      </p:cBhvr>
-                                      <p:to>
-                                        <p:strVal val="hidden"/>
-                                      </p:to>
-                                    </p:set>
-                                  </p:childTnLst>
-                                </p:cTn>
-                              </p:par>
-                              <p:par>
-                                <p:cTn id="31" presetID="1" presetClass="entr" presetSubtype="0" fill="hold" grpId="0" nodeType="withEffect">
-                                  <p:stCondLst>
-                                    <p:cond delay="0"/>
-                                  </p:stCondLst>
-                                  <p:childTnLst>
-                                    <p:set>
-                                      <p:cBhvr>
-                                        <p:cTn id="32" dur="1" fill="hold">
-                                          <p:stCondLst>
-                                            <p:cond delay="0"/>
-                                          </p:stCondLst>
-                                        </p:cTn>
-                                        <p:tgtEl>
-                                          <p:spTgt spid="3"/>
+                                          <p:spTgt spid="14">
+                                            <p:txEl>
+                                              <p:pRg st="7" end="7"/>
+                                            </p:txEl>
+                                          </p:spTgt>
                                         </p:tgtEl>
                                         <p:attrNameLst>
                                           <p:attrName>style.visibility</p:attrName>
@@ -4913,12 +4777,11 @@
       </p:par>
     </p:tnLst>
     <p:bldLst>
-      <p:bldP spid="8" grpId="0" animBg="1"/>
-      <p:bldP spid="8" grpId="1" animBg="1"/>
-      <p:bldP spid="9" grpId="0" animBg="1"/>
-      <p:bldP spid="9" grpId="1" animBg="1"/>
-      <p:bldP spid="10" grpId="0" animBg="1"/>
-      <p:bldP spid="3" grpId="0"/>
+      <p:bldP spid="5" grpId="0" animBg="1"/>
+      <p:bldP spid="5" grpId="1" animBg="1"/>
+      <p:bldP spid="6" grpId="1" animBg="1"/>
+      <p:bldP spid="6" grpId="2" animBg="1"/>
+      <p:bldP spid="7" grpId="0" animBg="1"/>
     </p:bldLst>
   </p:timing>
 </p:sld>
@@ -5738,40 +5601,12 @@
           <a:chExt cx="0" cy="0"/>
         </a:xfrm>
       </p:grpSpPr>
-      <p:sp>
-        <p:nvSpPr>
-          <p:cNvPr id="2" name="Title 1">
-            <a:extLst>
-              <a:ext uri="{FF2B5EF4-FFF2-40B4-BE49-F238E27FC236}">
-                <a16:creationId xmlns:a16="http://schemas.microsoft.com/office/drawing/2014/main" id="{BE1F32EE-B5BB-7018-D8DB-48EDCCC58251}"/>
-              </a:ext>
-            </a:extLst>
-          </p:cNvPr>
-          <p:cNvSpPr>
-            <a:spLocks noGrp="1"/>
-          </p:cNvSpPr>
-          <p:nvPr>
-            <p:ph type="title"/>
-          </p:nvPr>
-        </p:nvSpPr>
-        <p:spPr/>
-        <p:txBody>
-          <a:bodyPr/>
-          <a:lstStyle/>
-          <a:p>
-            <a:r>
-              <a:rPr lang="en-MT" dirty="0"/>
-              <a:t>Evaluation</a:t>
-            </a:r>
-          </a:p>
-        </p:txBody>
-      </p:sp>
       <p:pic>
         <p:nvPicPr>
-          <p:cNvPr id="16" name="Content Placeholder 15" descr="A screenshot of a graph&#10;&#10;AI-generated content may be incorrect.">
-            <a:extLst>
-              <a:ext uri="{FF2B5EF4-FFF2-40B4-BE49-F238E27FC236}">
-                <a16:creationId xmlns:a16="http://schemas.microsoft.com/office/drawing/2014/main" id="{C851AF64-1930-9DA8-B3BF-2DADA6A4DCF0}"/>
+          <p:cNvPr id="22" name="Content Placeholder 21" descr="A screenshot of a graph&#10;&#10;AI-generated content may be incorrect.">
+            <a:extLst>
+              <a:ext uri="{FF2B5EF4-FFF2-40B4-BE49-F238E27FC236}">
+                <a16:creationId xmlns:a16="http://schemas.microsoft.com/office/drawing/2014/main" id="{25BD6FFB-471A-C128-080D-6A67C256A476}"/>
               </a:ext>
             </a:extLst>
           </p:cNvPr>
@@ -5790,33 +5625,60 @@
         </p:blipFill>
         <p:spPr>
           <a:xfrm>
-            <a:off x="844138" y="1435308"/>
-            <a:ext cx="10351008" cy="5175504"/>
+            <a:off x="1035957" y="1432832"/>
+            <a:ext cx="10120086" cy="5060043"/>
           </a:xfrm>
         </p:spPr>
       </p:pic>
       <p:sp>
         <p:nvSpPr>
-          <p:cNvPr id="3" name="Rectangle 2">
-            <a:extLst>
-              <a:ext uri="{FF2B5EF4-FFF2-40B4-BE49-F238E27FC236}">
-                <a16:creationId xmlns:a16="http://schemas.microsoft.com/office/drawing/2014/main" id="{2EB87B23-F431-6704-0ED3-F9D269E65B32}"/>
-              </a:ext>
-            </a:extLst>
-          </p:cNvPr>
-          <p:cNvSpPr/>
+          <p:cNvPr id="2" name="Title 1">
+            <a:extLst>
+              <a:ext uri="{FF2B5EF4-FFF2-40B4-BE49-F238E27FC236}">
+                <a16:creationId xmlns:a16="http://schemas.microsoft.com/office/drawing/2014/main" id="{BE1F32EE-B5BB-7018-D8DB-48EDCCC58251}"/>
+              </a:ext>
+            </a:extLst>
+          </p:cNvPr>
+          <p:cNvSpPr>
+            <a:spLocks noGrp="1"/>
+          </p:cNvSpPr>
+          <p:nvPr>
+            <p:ph type="title"/>
+          </p:nvPr>
+        </p:nvSpPr>
+        <p:spPr/>
+        <p:txBody>
+          <a:bodyPr/>
+          <a:lstStyle/>
+          <a:p>
+            <a:r>
+              <a:rPr lang="en-MT" dirty="0"/>
+              <a:t>Evaluation</a:t>
+            </a:r>
+          </a:p>
+        </p:txBody>
+      </p:sp>
+      <p:cxnSp>
+        <p:nvCxnSpPr>
+          <p:cNvPr id="10" name="Straight Connector 9">
+            <a:extLst>
+              <a:ext uri="{FF2B5EF4-FFF2-40B4-BE49-F238E27FC236}">
+                <a16:creationId xmlns:a16="http://schemas.microsoft.com/office/drawing/2014/main" id="{B3F9EE3C-2371-A71D-6820-423A52C7FA55}"/>
+              </a:ext>
+            </a:extLst>
+          </p:cNvPr>
+          <p:cNvCxnSpPr/>
           <p:nvPr/>
-        </p:nvSpPr>
+        </p:nvCxnSpPr>
         <p:spPr>
           <a:xfrm>
-            <a:off x="3440552" y="4079173"/>
-            <a:ext cx="1428332" cy="439388"/>
+            <a:off x="1656608" y="3871356"/>
+            <a:ext cx="2202873" cy="0"/>
           </a:xfrm>
-          <a:prstGeom prst="rect">
+          <a:prstGeom prst="line">
             <a:avLst/>
           </a:prstGeom>
-          <a:noFill/>
-          <a:ln>
+          <a:ln w="38100">
             <a:solidFill>
               <a:srgbClr val="FF0000"/>
             </a:solidFill>
@@ -5825,51 +5687,42 @@
         </p:spPr>
         <p:style>
           <a:lnRef idx="2">
-            <a:schemeClr val="accent1">
-              <a:shade val="15000"/>
-            </a:schemeClr>
+            <a:schemeClr val="accent1"/>
           </a:lnRef>
-          <a:fillRef idx="1">
+          <a:fillRef idx="0">
             <a:schemeClr val="accent1"/>
           </a:fillRef>
-          <a:effectRef idx="0">
+          <a:effectRef idx="1">
             <a:schemeClr val="accent1"/>
           </a:effectRef>
           <a:fontRef idx="minor">
-            <a:schemeClr val="lt1"/>
+            <a:schemeClr val="tx1"/>
           </a:fontRef>
         </p:style>
-        <p:txBody>
-          <a:bodyPr rtlCol="0" anchor="ctr"/>
-          <a:lstStyle/>
-          <a:p>
-            <a:pPr algn="ctr"/>
-            <a:endParaRPr lang="en-MT"/>
-          </a:p>
-        </p:txBody>
-      </p:sp>
-      <p:sp>
-        <p:nvSpPr>
-          <p:cNvPr id="4" name="Rectangle 3">
-            <a:extLst>
-              <a:ext uri="{FF2B5EF4-FFF2-40B4-BE49-F238E27FC236}">
-                <a16:creationId xmlns:a16="http://schemas.microsoft.com/office/drawing/2014/main" id="{268E75FE-A1B5-FC4C-6DC1-7616B41DF71C}"/>
-              </a:ext>
-            </a:extLst>
-          </p:cNvPr>
-          <p:cNvSpPr/>
+      </p:cxnSp>
+      <p:cxnSp>
+        <p:nvCxnSpPr>
+          <p:cNvPr id="11" name="Straight Connector 10">
+            <a:extLst>
+              <a:ext uri="{FF2B5EF4-FFF2-40B4-BE49-F238E27FC236}">
+                <a16:creationId xmlns:a16="http://schemas.microsoft.com/office/drawing/2014/main" id="{669D17FE-EE6E-CBBD-B51C-492E2E649FD4}"/>
+              </a:ext>
+            </a:extLst>
+          </p:cNvPr>
+          <p:cNvCxnSpPr>
+            <a:cxnSpLocks/>
+          </p:cNvCxnSpPr>
           <p:nvPr/>
-        </p:nvSpPr>
+        </p:nvCxnSpPr>
         <p:spPr>
-          <a:xfrm>
-            <a:off x="7119924" y="3803366"/>
-            <a:ext cx="777167" cy="439388"/>
+          <a:xfrm flipV="1">
+            <a:off x="3596244" y="3485408"/>
+            <a:ext cx="0" cy="2470067"/>
           </a:xfrm>
-          <a:prstGeom prst="rect">
+          <a:prstGeom prst="line">
             <a:avLst/>
           </a:prstGeom>
-          <a:noFill/>
-          <a:ln>
+          <a:ln w="38100">
             <a:solidFill>
               <a:srgbClr val="FF0000"/>
             </a:solidFill>
@@ -5878,29 +5731,105 @@
         </p:spPr>
         <p:style>
           <a:lnRef idx="2">
-            <a:schemeClr val="accent1">
-              <a:shade val="15000"/>
-            </a:schemeClr>
+            <a:schemeClr val="accent1"/>
           </a:lnRef>
-          <a:fillRef idx="1">
+          <a:fillRef idx="0">
             <a:schemeClr val="accent1"/>
           </a:fillRef>
-          <a:effectRef idx="0">
+          <a:effectRef idx="1">
             <a:schemeClr val="accent1"/>
           </a:effectRef>
           <a:fontRef idx="minor">
-            <a:schemeClr val="lt1"/>
+            <a:schemeClr val="tx1"/>
           </a:fontRef>
         </p:style>
-        <p:txBody>
-          <a:bodyPr rtlCol="0" anchor="ctr"/>
-          <a:lstStyle/>
-          <a:p>
-            <a:pPr algn="ctr"/>
-            <a:endParaRPr lang="en-MT"/>
-          </a:p>
-        </p:txBody>
-      </p:sp>
+      </p:cxnSp>
+      <p:cxnSp>
+        <p:nvCxnSpPr>
+          <p:cNvPr id="23" name="Straight Connector 22">
+            <a:extLst>
+              <a:ext uri="{FF2B5EF4-FFF2-40B4-BE49-F238E27FC236}">
+                <a16:creationId xmlns:a16="http://schemas.microsoft.com/office/drawing/2014/main" id="{5D129732-C15B-9BD5-5164-F267018267B2}"/>
+              </a:ext>
+            </a:extLst>
+          </p:cNvPr>
+          <p:cNvCxnSpPr/>
+          <p:nvPr/>
+        </p:nvCxnSpPr>
+        <p:spPr>
+          <a:xfrm>
+            <a:off x="7271657" y="4106883"/>
+            <a:ext cx="2202873" cy="0"/>
+          </a:xfrm>
+          <a:prstGeom prst="line">
+            <a:avLst/>
+          </a:prstGeom>
+          <a:ln w="38100">
+            <a:solidFill>
+              <a:srgbClr val="FF0000"/>
+            </a:solidFill>
+            <a:prstDash val="dash"/>
+          </a:ln>
+        </p:spPr>
+        <p:style>
+          <a:lnRef idx="2">
+            <a:schemeClr val="accent1"/>
+          </a:lnRef>
+          <a:fillRef idx="0">
+            <a:schemeClr val="accent1"/>
+          </a:fillRef>
+          <a:effectRef idx="1">
+            <a:schemeClr val="accent1"/>
+          </a:effectRef>
+          <a:fontRef idx="minor">
+            <a:schemeClr val="tx1"/>
+          </a:fontRef>
+        </p:style>
+      </p:cxnSp>
+      <p:cxnSp>
+        <p:nvCxnSpPr>
+          <p:cNvPr id="24" name="Straight Connector 23">
+            <a:extLst>
+              <a:ext uri="{FF2B5EF4-FFF2-40B4-BE49-F238E27FC236}">
+                <a16:creationId xmlns:a16="http://schemas.microsoft.com/office/drawing/2014/main" id="{B924A0CA-4739-9632-4E19-9278884E9240}"/>
+              </a:ext>
+            </a:extLst>
+          </p:cNvPr>
+          <p:cNvCxnSpPr>
+            <a:cxnSpLocks/>
+          </p:cNvCxnSpPr>
+          <p:nvPr/>
+        </p:nvCxnSpPr>
+        <p:spPr>
+          <a:xfrm>
+            <a:off x="7542811" y="4000005"/>
+            <a:ext cx="0" cy="1955470"/>
+          </a:xfrm>
+          <a:prstGeom prst="line">
+            <a:avLst/>
+          </a:prstGeom>
+          <a:ln w="38100">
+            <a:solidFill>
+              <a:srgbClr val="FF0000"/>
+            </a:solidFill>
+            <a:prstDash val="dash"/>
+          </a:ln>
+        </p:spPr>
+        <p:style>
+          <a:lnRef idx="2">
+            <a:schemeClr val="accent1"/>
+          </a:lnRef>
+          <a:fillRef idx="0">
+            <a:schemeClr val="accent1"/>
+          </a:fillRef>
+          <a:effectRef idx="1">
+            <a:schemeClr val="accent1"/>
+          </a:effectRef>
+          <a:fontRef idx="minor">
+            <a:schemeClr val="tx1"/>
+          </a:fontRef>
+        </p:style>
+      </p:cxnSp>
     </p:spTree>
     <p:extLst>
       <p:ext uri="{BB962C8B-B14F-4D97-AF65-F5344CB8AC3E}">
@@ -5932,7 +5861,7 @@
                             </p:stCondLst>
                             <p:childTnLst>
                               <p:par>
-                                <p:cTn id="5" presetID="1" presetClass="entr" presetSubtype="0" fill="hold" grpId="2" nodeType="clickEffect">
+                                <p:cTn id="5" presetID="1" presetClass="entr" presetSubtype="0" fill="hold" nodeType="clickEffect">
                                   <p:stCondLst>
                                     <p:cond delay="0"/>
                                   </p:stCondLst>
@@ -5945,7 +5874,34 @@
                                           </p:stCondLst>
                                         </p:cTn>
                                         <p:tgtEl>
-                                          <p:spTgt spid="3"/>
+                                          <p:spTgt spid="10"/>
+                                        </p:tgtEl>
+                                        <p:attrNameLst>
+                                          <p:attrName>style.visibility</p:attrName>
+                                        </p:attrNameLst>
+                                      </p:cBhvr>
+                                      <p:to>
+                                        <p:strVal val="visible"/>
+                                      </p:to>
+                                    </p:set>
+                                  </p:childTnLst>
+                                </p:cTn>
+                              </p:par>
+                              <p:par>
+                                <p:cTn id="7" presetID="1" presetClass="entr" presetSubtype="0" fill="hold" nodeType="withEffect">
+                                  <p:stCondLst>
+                                    <p:cond delay="0"/>
+                                  </p:stCondLst>
+                                  <p:childTnLst>
+                                    <p:set>
+                                      <p:cBhvr>
+                                        <p:cTn id="8" dur="1" fill="hold">
+                                          <p:stCondLst>
+                                            <p:cond delay="0"/>
+                                          </p:stCondLst>
+                                        </p:cTn>
+                                        <p:tgtEl>
+                                          <p:spTgt spid="11"/>
                                         </p:tgtEl>
                                         <p:attrNameLst>
                                           <p:attrName>style.visibility</p:attrName>
@@ -5965,32 +5921,113 @@
                     </p:cTn>
                   </p:par>
                   <p:par>
-                    <p:cTn id="7" fill="hold">
+                    <p:cTn id="9" fill="hold">
                       <p:stCondLst>
                         <p:cond delay="indefinite"/>
                       </p:stCondLst>
                       <p:childTnLst>
                         <p:par>
-                          <p:cTn id="8" fill="hold">
+                          <p:cTn id="10" fill="hold">
                             <p:stCondLst>
                               <p:cond delay="0"/>
                             </p:stCondLst>
                             <p:childTnLst>
                               <p:par>
-                                <p:cTn id="9" presetID="1" presetClass="entr" presetSubtype="0" fill="hold" grpId="2" nodeType="clickEffect">
+                                <p:cTn id="11" presetID="1" presetClass="exit" presetSubtype="0" fill="hold" nodeType="clickEffect">
                                   <p:stCondLst>
                                     <p:cond delay="0"/>
                                   </p:stCondLst>
                                   <p:childTnLst>
                                     <p:set>
                                       <p:cBhvr>
-                                        <p:cTn id="10" dur="1" fill="hold">
+                                        <p:cTn id="12" dur="1" fill="hold">
                                           <p:stCondLst>
                                             <p:cond delay="0"/>
                                           </p:stCondLst>
                                         </p:cTn>
                                         <p:tgtEl>
-                                          <p:spTgt spid="4"/>
+                                          <p:spTgt spid="10"/>
+                                        </p:tgtEl>
+                                        <p:attrNameLst>
+                                          <p:attrName>style.visibility</p:attrName>
+                                        </p:attrNameLst>
+                                      </p:cBhvr>
+                                      <p:to>
+                                        <p:strVal val="hidden"/>
+                                      </p:to>
+                                    </p:set>
+                                  </p:childTnLst>
+                                </p:cTn>
+                              </p:par>
+                              <p:par>
+                                <p:cTn id="13" presetID="1" presetClass="exit" presetSubtype="0" fill="hold" nodeType="withEffect">
+                                  <p:stCondLst>
+                                    <p:cond delay="0"/>
+                                  </p:stCondLst>
+                                  <p:childTnLst>
+                                    <p:set>
+                                      <p:cBhvr>
+                                        <p:cTn id="14" dur="1" fill="hold">
+                                          <p:stCondLst>
+                                            <p:cond delay="0"/>
+                                          </p:stCondLst>
+                                        </p:cTn>
+                                        <p:tgtEl>
+                                          <p:spTgt spid="11"/>
+                                        </p:tgtEl>
+                                        <p:attrNameLst>
+                                          <p:attrName>style.visibility</p:attrName>
+                                        </p:attrNameLst>
+                                      </p:cBhvr>
+                                      <p:to>
+                                        <p:strVal val="hidden"/>
+                                      </p:to>
+                                    </p:set>
+                                  </p:childTnLst>
+                                </p:cTn>
+                              </p:par>
+                              <p:par>
+                                <p:cTn id="15" presetID="1" presetClass="entr" presetSubtype="0" fill="hold" nodeType="withEffect">
+                                  <p:stCondLst>
+                                    <p:cond delay="0"/>
+                                  </p:stCondLst>
+                                  <p:childTnLst>
+                                    <p:set>
+                                      <p:cBhvr>
+                                        <p:cTn id="16" dur="1" fill="hold">
+                                          <p:stCondLst>
+                                            <p:cond delay="0"/>
+                                          </p:stCondLst>
+                                        </p:cTn>
+                                        <p:tgtEl>
+                                          <p:spTgt spid="23"/>
+                                        </p:tgtEl>
+                                        <p:attrNameLst>
+                                          <p:attrName>style.visibility</p:attrName>
+                                        </p:attrNameLst>
+                                      </p:cBhvr>
+                                      <p:to>
+                                        <p:strVal val="visible"/>
+                                      </p:to>
+                                    </p:set>
+                                  </p:childTnLst>
+                                </p:cTn>
+                              </p:par>
+                              <p:par>
+                                <p:cTn id="17" presetID="1" presetClass="entr" presetSubtype="0" fill="hold" nodeType="withEffect">
+                                  <p:stCondLst>
+                                    <p:cond delay="0"/>
+                                  </p:stCondLst>
+                                  <p:childTnLst>
+                                    <p:set>
+                                      <p:cBhvr>
+                                        <p:cTn id="18" dur="1" fill="hold">
+                                          <p:stCondLst>
+                                            <p:cond delay="0"/>
+                                          </p:stCondLst>
+                                        </p:cTn>
+                                        <p:tgtEl>
+                                          <p:spTgt spid="24"/>
                                         </p:tgtEl>
                                         <p:attrNameLst>
                                           <p:attrName>style.visibility</p:attrName>
@@ -6030,10 +6067,6 @@
         </p:cTn>
       </p:par>
     </p:tnLst>
-    <p:bldLst>
-      <p:bldP spid="3" grpId="2" animBg="1"/>
-      <p:bldP spid="4" grpId="2" animBg="1"/>
-    </p:bldLst>
   </p:timing>
 </p:sld>
 </file>
@@ -6061,12 +6094,118 @@
           <a:chExt cx="0" cy="0"/>
         </a:xfrm>
       </p:grpSpPr>
+      <p:sp>
+        <p:nvSpPr>
+          <p:cNvPr id="2" name="Title 1">
+            <a:extLst>
+              <a:ext uri="{FF2B5EF4-FFF2-40B4-BE49-F238E27FC236}">
+                <a16:creationId xmlns:a16="http://schemas.microsoft.com/office/drawing/2014/main" id="{9E7169EE-DCA5-6DE1-C915-5BFB6D579701}"/>
+              </a:ext>
+            </a:extLst>
+          </p:cNvPr>
+          <p:cNvSpPr>
+            <a:spLocks noGrp="1"/>
+          </p:cNvSpPr>
+          <p:nvPr>
+            <p:ph type="title"/>
+          </p:nvPr>
+        </p:nvSpPr>
+        <p:spPr/>
+        <p:txBody>
+          <a:bodyPr/>
+          <a:lstStyle/>
+          <a:p>
+            <a:r>
+              <a:rPr lang="en-MT" dirty="0"/>
+              <a:t>Evaluation</a:t>
+            </a:r>
+          </a:p>
+        </p:txBody>
+      </p:sp>
+      <p:sp>
+        <p:nvSpPr>
+          <p:cNvPr id="16" name="TextBox 15">
+            <a:extLst>
+              <a:ext uri="{FF2B5EF4-FFF2-40B4-BE49-F238E27FC236}">
+                <a16:creationId xmlns:a16="http://schemas.microsoft.com/office/drawing/2014/main" id="{EF79FA52-EC41-C328-B943-F4B3D452C0E5}"/>
+              </a:ext>
+            </a:extLst>
+          </p:cNvPr>
+          <p:cNvSpPr txBox="1"/>
+          <p:nvPr/>
+        </p:nvSpPr>
+        <p:spPr>
+          <a:xfrm>
+            <a:off x="2180897" y="1547657"/>
+            <a:ext cx="2427890" cy="523220"/>
+          </a:xfrm>
+          <a:prstGeom prst="rect">
+            <a:avLst/>
+          </a:prstGeom>
+          <a:noFill/>
+        </p:spPr>
+        <p:txBody>
+          <a:bodyPr wrap="square" rtlCol="0">
+            <a:spAutoFit/>
+          </a:bodyPr>
+          <a:lstStyle/>
+          <a:p>
+            <a:r>
+              <a:rPr lang="en-MT" sz="2800" dirty="0"/>
+              <a:t>Na</a:t>
+            </a:r>
+            <a:r>
+              <a:rPr lang="en-GB" sz="2800" dirty="0" err="1"/>
+              <a:t>ï</a:t>
+            </a:r>
+            <a:r>
+              <a:rPr lang="en-MT" sz="2800" dirty="0"/>
+              <a:t>ve Bayes</a:t>
+            </a:r>
+          </a:p>
+        </p:txBody>
+      </p:sp>
+      <p:sp>
+        <p:nvSpPr>
+          <p:cNvPr id="17" name="TextBox 16">
+            <a:extLst>
+              <a:ext uri="{FF2B5EF4-FFF2-40B4-BE49-F238E27FC236}">
+                <a16:creationId xmlns:a16="http://schemas.microsoft.com/office/drawing/2014/main" id="{DC8559E2-1AED-E6B2-F688-6745D2A3C216}"/>
+              </a:ext>
+            </a:extLst>
+          </p:cNvPr>
+          <p:cNvSpPr txBox="1"/>
+          <p:nvPr/>
+        </p:nvSpPr>
+        <p:spPr>
+          <a:xfrm>
+            <a:off x="8448646" y="1599022"/>
+            <a:ext cx="1099115" cy="523220"/>
+          </a:xfrm>
+          <a:prstGeom prst="rect">
+            <a:avLst/>
+          </a:prstGeom>
+          <a:noFill/>
+        </p:spPr>
+        <p:txBody>
+          <a:bodyPr wrap="square" rtlCol="0">
+            <a:spAutoFit/>
+          </a:bodyPr>
+          <a:lstStyle/>
+          <a:p>
+            <a:r>
+              <a:rPr lang="en-MT" sz="2800" dirty="0"/>
+              <a:t>K-NN</a:t>
+            </a:r>
+          </a:p>
+        </p:txBody>
+      </p:sp>
       <p:pic>
         <p:nvPicPr>
-          <p:cNvPr id="8" name="Picture 7" descr="A graph with numbers and text&#10;&#10;AI-generated content may be incorrect.">
-            <a:extLst>
-              <a:ext uri="{FF2B5EF4-FFF2-40B4-BE49-F238E27FC236}">
-                <a16:creationId xmlns:a16="http://schemas.microsoft.com/office/drawing/2014/main" id="{C810A3B1-66F6-9EC8-BC88-7339A8E7454E}"/>
+          <p:cNvPr id="4" name="Picture 3" descr="A graph with numbers and text&#10;&#10;AI-generated content may be incorrect.">
+            <a:extLst>
+              <a:ext uri="{FF2B5EF4-FFF2-40B4-BE49-F238E27FC236}">
+                <a16:creationId xmlns:a16="http://schemas.microsoft.com/office/drawing/2014/main" id="{14A30C94-66DC-A040-7B9D-2FACECDD6E42}"/>
               </a:ext>
             </a:extLst>
           </p:cNvPr>
@@ -6083,7 +6222,7 @@
         </p:blipFill>
         <p:spPr>
           <a:xfrm>
-            <a:off x="6726133" y="2160000"/>
+            <a:off x="997856" y="2160000"/>
             <a:ext cx="4320000" cy="4320000"/>
           </a:xfrm>
           <a:prstGeom prst="rect">
@@ -6093,10 +6232,10 @@
       </p:pic>
       <p:pic>
         <p:nvPicPr>
-          <p:cNvPr id="5" name="Picture 4" descr="A graph with numbers and text&#10;&#10;AI-generated content may be incorrect.">
-            <a:extLst>
-              <a:ext uri="{FF2B5EF4-FFF2-40B4-BE49-F238E27FC236}">
-                <a16:creationId xmlns:a16="http://schemas.microsoft.com/office/drawing/2014/main" id="{924B5464-2575-5B0B-6EDA-8EC1C5EC1491}"/>
+          <p:cNvPr id="7" name="Picture 6" descr="A graph with numbers and text&#10;&#10;AI-generated content may be incorrect.">
+            <a:extLst>
+              <a:ext uri="{FF2B5EF4-FFF2-40B4-BE49-F238E27FC236}">
+                <a16:creationId xmlns:a16="http://schemas.microsoft.com/office/drawing/2014/main" id="{CFA0231A-7030-53BE-EB0B-34C29A472E22}"/>
               </a:ext>
             </a:extLst>
           </p:cNvPr>
@@ -6113,7 +6252,7 @@
         </p:blipFill>
         <p:spPr>
           <a:xfrm>
-            <a:off x="1456210" y="2160000"/>
+            <a:off x="6734632" y="2160000"/>
             <a:ext cx="4320000" cy="4320000"/>
           </a:xfrm>
           <a:prstGeom prst="rect">
@@ -6123,126 +6262,20 @@
       </p:pic>
       <p:sp>
         <p:nvSpPr>
-          <p:cNvPr id="2" name="Title 1">
-            <a:extLst>
-              <a:ext uri="{FF2B5EF4-FFF2-40B4-BE49-F238E27FC236}">
-                <a16:creationId xmlns:a16="http://schemas.microsoft.com/office/drawing/2014/main" id="{9E7169EE-DCA5-6DE1-C915-5BFB6D579701}"/>
-              </a:ext>
-            </a:extLst>
-          </p:cNvPr>
-          <p:cNvSpPr>
-            <a:spLocks noGrp="1"/>
-          </p:cNvSpPr>
-          <p:nvPr>
-            <p:ph type="title"/>
-          </p:nvPr>
-        </p:nvSpPr>
-        <p:spPr/>
-        <p:txBody>
-          <a:bodyPr/>
-          <a:lstStyle/>
-          <a:p>
-            <a:r>
-              <a:rPr lang="en-MT" dirty="0"/>
-              <a:t>Evaluation</a:t>
-            </a:r>
-          </a:p>
-        </p:txBody>
-      </p:sp>
-      <p:sp>
-        <p:nvSpPr>
-          <p:cNvPr id="16" name="TextBox 15">
-            <a:extLst>
-              <a:ext uri="{FF2B5EF4-FFF2-40B4-BE49-F238E27FC236}">
-                <a16:creationId xmlns:a16="http://schemas.microsoft.com/office/drawing/2014/main" id="{EF79FA52-EC41-C328-B943-F4B3D452C0E5}"/>
-              </a:ext>
-            </a:extLst>
-          </p:cNvPr>
-          <p:cNvSpPr txBox="1"/>
+          <p:cNvPr id="12" name="Rectangle 11">
+            <a:extLst>
+              <a:ext uri="{FF2B5EF4-FFF2-40B4-BE49-F238E27FC236}">
+                <a16:creationId xmlns:a16="http://schemas.microsoft.com/office/drawing/2014/main" id="{3475971A-F952-20CA-121F-69C5F8FAEA42}"/>
+              </a:ext>
+            </a:extLst>
+          </p:cNvPr>
+          <p:cNvSpPr/>
           <p:nvPr/>
         </p:nvSpPr>
         <p:spPr>
           <a:xfrm>
-            <a:off x="2180897" y="1547657"/>
-            <a:ext cx="2427890" cy="523220"/>
-          </a:xfrm>
-          <a:prstGeom prst="rect">
-            <a:avLst/>
-          </a:prstGeom>
-          <a:noFill/>
-        </p:spPr>
-        <p:txBody>
-          <a:bodyPr wrap="square" rtlCol="0">
-            <a:spAutoFit/>
-          </a:bodyPr>
-          <a:lstStyle/>
-          <a:p>
-            <a:r>
-              <a:rPr lang="en-MT" sz="2800" dirty="0"/>
-              <a:t>Na</a:t>
-            </a:r>
-            <a:r>
-              <a:rPr lang="en-GB" sz="2800" dirty="0" err="1"/>
-              <a:t>ï</a:t>
-            </a:r>
-            <a:r>
-              <a:rPr lang="en-MT" sz="2800" dirty="0"/>
-              <a:t>ve Bayes</a:t>
-            </a:r>
-          </a:p>
-        </p:txBody>
-      </p:sp>
-      <p:sp>
-        <p:nvSpPr>
-          <p:cNvPr id="17" name="TextBox 16">
-            <a:extLst>
-              <a:ext uri="{FF2B5EF4-FFF2-40B4-BE49-F238E27FC236}">
-                <a16:creationId xmlns:a16="http://schemas.microsoft.com/office/drawing/2014/main" id="{DC8559E2-1AED-E6B2-F688-6745D2A3C216}"/>
-              </a:ext>
-            </a:extLst>
-          </p:cNvPr>
-          <p:cNvSpPr txBox="1"/>
-          <p:nvPr/>
-        </p:nvSpPr>
-        <p:spPr>
-          <a:xfrm>
-            <a:off x="8448646" y="1599022"/>
-            <a:ext cx="1099115" cy="523220"/>
-          </a:xfrm>
-          <a:prstGeom prst="rect">
-            <a:avLst/>
-          </a:prstGeom>
-          <a:noFill/>
-        </p:spPr>
-        <p:txBody>
-          <a:bodyPr wrap="square" rtlCol="0">
-            <a:spAutoFit/>
-          </a:bodyPr>
-          <a:lstStyle/>
-          <a:p>
-            <a:r>
-              <a:rPr lang="en-MT" sz="2800" dirty="0"/>
-              <a:t>K-NN</a:t>
-            </a:r>
-          </a:p>
-        </p:txBody>
-      </p:sp>
-      <p:sp>
-        <p:nvSpPr>
-          <p:cNvPr id="14" name="Rectangle 13">
-            <a:extLst>
-              <a:ext uri="{FF2B5EF4-FFF2-40B4-BE49-F238E27FC236}">
-                <a16:creationId xmlns:a16="http://schemas.microsoft.com/office/drawing/2014/main" id="{0866E595-5419-8A25-F1FE-7D944575C967}"/>
-              </a:ext>
-            </a:extLst>
-          </p:cNvPr>
-          <p:cNvSpPr/>
-          <p:nvPr/>
-        </p:nvSpPr>
-        <p:spPr>
-          <a:xfrm>
-            <a:off x="2231754" y="4085112"/>
-            <a:ext cx="3385275" cy="1116279"/>
+            <a:off x="1695674" y="4093029"/>
+            <a:ext cx="3622182" cy="1217314"/>
           </a:xfrm>
           <a:prstGeom prst="rect">
             <a:avLst/>
@@ -6282,10 +6315,10 @@
       </p:sp>
       <p:sp>
         <p:nvSpPr>
-          <p:cNvPr id="20" name="Rectangle 19">
-            <a:extLst>
-              <a:ext uri="{FF2B5EF4-FFF2-40B4-BE49-F238E27FC236}">
-                <a16:creationId xmlns:a16="http://schemas.microsoft.com/office/drawing/2014/main" id="{544F8FC5-C9B7-B473-2F15-8A197D64331C}"/>
+          <p:cNvPr id="13" name="Rectangle 12">
+            <a:extLst>
+              <a:ext uri="{FF2B5EF4-FFF2-40B4-BE49-F238E27FC236}">
+                <a16:creationId xmlns:a16="http://schemas.microsoft.com/office/drawing/2014/main" id="{FC6287E5-BD7D-2756-C28B-5BBBBC14185A}"/>
               </a:ext>
             </a:extLst>
           </p:cNvPr>
@@ -6294,8 +6327,8 @@
         </p:nvSpPr>
         <p:spPr>
           <a:xfrm>
-            <a:off x="4447310" y="2354470"/>
-            <a:ext cx="1169720" cy="2904508"/>
+            <a:off x="2902856" y="2540189"/>
+            <a:ext cx="2414999" cy="1552840"/>
           </a:xfrm>
           <a:prstGeom prst="rect">
             <a:avLst/>
@@ -6335,10 +6368,10 @@
       </p:sp>
       <p:sp>
         <p:nvSpPr>
-          <p:cNvPr id="10" name="Rectangle 9">
-            <a:extLst>
-              <a:ext uri="{FF2B5EF4-FFF2-40B4-BE49-F238E27FC236}">
-                <a16:creationId xmlns:a16="http://schemas.microsoft.com/office/drawing/2014/main" id="{A315AA94-5D08-78D7-9B88-5540B11D6D5A}"/>
+          <p:cNvPr id="15" name="Rectangle 14">
+            <a:extLst>
+              <a:ext uri="{FF2B5EF4-FFF2-40B4-BE49-F238E27FC236}">
+                <a16:creationId xmlns:a16="http://schemas.microsoft.com/office/drawing/2014/main" id="{78FCDD7F-834E-352D-111C-36976D008434}"/>
               </a:ext>
             </a:extLst>
           </p:cNvPr>
@@ -6347,61 +6380,8 @@
         </p:nvSpPr>
         <p:spPr>
           <a:xfrm>
-            <a:off x="7496481" y="4085111"/>
-            <a:ext cx="3385275" cy="1116279"/>
-          </a:xfrm>
-          <a:prstGeom prst="rect">
-            <a:avLst/>
-          </a:prstGeom>
-          <a:noFill/>
-          <a:ln>
-            <a:solidFill>
-              <a:srgbClr val="FF0000"/>
-            </a:solidFill>
-            <a:prstDash val="dash"/>
-          </a:ln>
-        </p:spPr>
-        <p:style>
-          <a:lnRef idx="2">
-            <a:schemeClr val="accent1">
-              <a:shade val="15000"/>
-            </a:schemeClr>
-          </a:lnRef>
-          <a:fillRef idx="1">
-            <a:schemeClr val="accent1"/>
-          </a:fillRef>
-          <a:effectRef idx="0">
-            <a:schemeClr val="accent1"/>
-          </a:effectRef>
-          <a:fontRef idx="minor">
-            <a:schemeClr val="lt1"/>
-          </a:fontRef>
-        </p:style>
-        <p:txBody>
-          <a:bodyPr rtlCol="0" anchor="ctr"/>
-          <a:lstStyle/>
-          <a:p>
-            <a:pPr algn="ctr"/>
-            <a:endParaRPr lang="en-MT"/>
-          </a:p>
-        </p:txBody>
-      </p:sp>
-      <p:sp>
-        <p:nvSpPr>
-          <p:cNvPr id="11" name="Rectangle 10">
-            <a:extLst>
-              <a:ext uri="{FF2B5EF4-FFF2-40B4-BE49-F238E27FC236}">
-                <a16:creationId xmlns:a16="http://schemas.microsoft.com/office/drawing/2014/main" id="{17906D75-8839-B502-7EE2-8D2A8D8DE0BF}"/>
-              </a:ext>
-            </a:extLst>
-          </p:cNvPr>
-          <p:cNvSpPr/>
-          <p:nvPr/>
-        </p:nvSpPr>
-        <p:spPr>
-          <a:xfrm>
-            <a:off x="9712036" y="2354470"/>
-            <a:ext cx="1169720" cy="2904508"/>
+            <a:off x="7517081" y="2377892"/>
+            <a:ext cx="3467594" cy="2881085"/>
           </a:xfrm>
           <a:prstGeom prst="rect">
             <a:avLst/>
@@ -6486,34 +6466,7 @@
                                           </p:stCondLst>
                                         </p:cTn>
                                         <p:tgtEl>
-                                          <p:spTgt spid="14"/>
-                                        </p:tgtEl>
-                                        <p:attrNameLst>
-                                          <p:attrName>style.visibility</p:attrName>
-                                        </p:attrNameLst>
-                                      </p:cBhvr>
-                                      <p:to>
-                                        <p:strVal val="visible"/>
-                                      </p:to>
-                                    </p:set>
-                                  </p:childTnLst>
-                                </p:cTn>
-                              </p:par>
-                              <p:par>
-                                <p:cTn id="7" presetID="1" presetClass="entr" presetSubtype="0" fill="hold" grpId="0" nodeType="withEffect">
-                                  <p:stCondLst>
-                                    <p:cond delay="0"/>
-                                  </p:stCondLst>
-                                  <p:childTnLst>
-                                    <p:set>
-                                      <p:cBhvr>
-                                        <p:cTn id="8" dur="1" fill="hold">
-                                          <p:stCondLst>
-                                            <p:cond delay="0"/>
-                                          </p:stCondLst>
-                                        </p:cTn>
-                                        <p:tgtEl>
-                                          <p:spTgt spid="10"/>
+                                          <p:spTgt spid="12"/>
                                         </p:tgtEl>
                                         <p:attrNameLst>
                                           <p:attrName>style.visibility</p:attrName>
@@ -6533,86 +6486,32 @@
                     </p:cTn>
                   </p:par>
                   <p:par>
-                    <p:cTn id="9" fill="hold">
+                    <p:cTn id="7" fill="hold">
                       <p:stCondLst>
                         <p:cond delay="indefinite"/>
                       </p:stCondLst>
                       <p:childTnLst>
                         <p:par>
-                          <p:cTn id="10" fill="hold">
+                          <p:cTn id="8" fill="hold">
                             <p:stCondLst>
                               <p:cond delay="0"/>
                             </p:stCondLst>
                             <p:childTnLst>
                               <p:par>
-                                <p:cTn id="11" presetID="1" presetClass="entr" presetSubtype="0" fill="hold" grpId="0" nodeType="clickEffect">
+                                <p:cTn id="9" presetID="1" presetClass="exit" presetSubtype="0" fill="hold" grpId="1" nodeType="clickEffect">
                                   <p:stCondLst>
                                     <p:cond delay="0"/>
                                   </p:stCondLst>
                                   <p:childTnLst>
                                     <p:set>
                                       <p:cBhvr>
-                                        <p:cTn id="12" dur="1" fill="hold">
+                                        <p:cTn id="10" dur="1" fill="hold">
                                           <p:stCondLst>
                                             <p:cond delay="0"/>
                                           </p:stCondLst>
                                         </p:cTn>
                                         <p:tgtEl>
-                                          <p:spTgt spid="20"/>
-                                        </p:tgtEl>
-                                        <p:attrNameLst>
-                                          <p:attrName>style.visibility</p:attrName>
-                                        </p:attrNameLst>
-                                      </p:cBhvr>
-                                      <p:to>
-                                        <p:strVal val="visible"/>
-                                      </p:to>
-                                    </p:set>
-                                  </p:childTnLst>
-                                </p:cTn>
-                              </p:par>
-                              <p:par>
-                                <p:cTn id="13" presetID="1" presetClass="entr" presetSubtype="0" fill="hold" grpId="0" nodeType="withEffect">
-                                  <p:stCondLst>
-                                    <p:cond delay="0"/>
-                                  </p:stCondLst>
-                                  <p:childTnLst>
-                                    <p:set>
-                                      <p:cBhvr>
-                                        <p:cTn id="14" dur="1" fill="hold">
-                                          <p:stCondLst>
-                                            <p:cond delay="0"/>
-                                          </p:stCondLst>
-                                        </p:cTn>
-                                        <p:tgtEl>
-                                          <p:spTgt spid="11"/>
-                                        </p:tgtEl>
-                                        <p:attrNameLst>
-                                          <p:attrName>style.visibility</p:attrName>
-                                        </p:attrNameLst>
-                                      </p:cBhvr>
-                                      <p:to>
-                                        <p:strVal val="visible"/>
-                                      </p:to>
-                                    </p:set>
-                                  </p:childTnLst>
-                                </p:cTn>
-                              </p:par>
-                              <p:par>
-                                <p:cTn id="15" presetID="1" presetClass="exit" presetSubtype="0" fill="hold" grpId="1" nodeType="withEffect">
-                                  <p:stCondLst>
-                                    <p:cond delay="0"/>
-                                  </p:stCondLst>
-                                  <p:childTnLst>
-                                    <p:set>
-                                      <p:cBhvr>
-                                        <p:cTn id="16" dur="1" fill="hold">
-                                          <p:stCondLst>
-                                            <p:cond delay="0"/>
-                                          </p:stCondLst>
-                                        </p:cTn>
-                                        <p:tgtEl>
-                                          <p:spTgt spid="14"/>
+                                          <p:spTgt spid="12"/>
                                         </p:tgtEl>
                                         <p:attrNameLst>
                                           <p:attrName>style.visibility</p:attrName>
@@ -6626,7 +6525,79 @@
                                 </p:cTn>
                               </p:par>
                               <p:par>
-                                <p:cTn id="17" presetID="1" presetClass="exit" presetSubtype="0" fill="hold" grpId="1" nodeType="withEffect">
+                                <p:cTn id="11" presetID="1" presetClass="entr" presetSubtype="0" fill="hold" grpId="0" nodeType="withEffect">
+                                  <p:stCondLst>
+                                    <p:cond delay="0"/>
+                                  </p:stCondLst>
+                                  <p:childTnLst>
+                                    <p:set>
+                                      <p:cBhvr>
+                                        <p:cTn id="12" dur="1" fill="hold">
+                                          <p:stCondLst>
+                                            <p:cond delay="0"/>
+                                          </p:stCondLst>
+                                        </p:cTn>
+                                        <p:tgtEl>
+                                          <p:spTgt spid="13"/>
+                                        </p:tgtEl>
+                                        <p:attrNameLst>
+                                          <p:attrName>style.visibility</p:attrName>
+                                        </p:attrNameLst>
+                                      </p:cBhvr>
+                                      <p:to>
+                                        <p:strVal val="visible"/>
+                                      </p:to>
+                                    </p:set>
+                                  </p:childTnLst>
+                                </p:cTn>
+                              </p:par>
+                            </p:childTnLst>
+                          </p:cTn>
+                        </p:par>
+                      </p:childTnLst>
+                    </p:cTn>
+                  </p:par>
+                  <p:par>
+                    <p:cTn id="13" fill="hold">
+                      <p:stCondLst>
+                        <p:cond delay="indefinite"/>
+                      </p:stCondLst>
+                      <p:childTnLst>
+                        <p:par>
+                          <p:cTn id="14" fill="hold">
+                            <p:stCondLst>
+                              <p:cond delay="0"/>
+                            </p:stCondLst>
+                            <p:childTnLst>
+                              <p:par>
+                                <p:cTn id="15" presetID="1" presetClass="exit" presetSubtype="0" fill="hold" grpId="1" nodeType="clickEffect">
+                                  <p:stCondLst>
+                                    <p:cond delay="0"/>
+                                  </p:stCondLst>
+                                  <p:childTnLst>
+                                    <p:set>
+                                      <p:cBhvr>
+                                        <p:cTn id="16" dur="1" fill="hold">
+                                          <p:stCondLst>
+                                            <p:cond delay="0"/>
+                                          </p:stCondLst>
+                                        </p:cTn>
+                                        <p:tgtEl>
+                                          <p:spTgt spid="13"/>
+                                        </p:tgtEl>
+                                        <p:attrNameLst>
+                                          <p:attrName>style.visibility</p:attrName>
+                                        </p:attrNameLst>
+                                      </p:cBhvr>
+                                      <p:to>
+                                        <p:strVal val="hidden"/>
+                                      </p:to>
+                                    </p:set>
+                                  </p:childTnLst>
+                                </p:cTn>
+                              </p:par>
+                              <p:par>
+                                <p:cTn id="17" presetID="1" presetClass="entr" presetSubtype="0" fill="hold" grpId="0" nodeType="withEffect">
                                   <p:stCondLst>
                                     <p:cond delay="0"/>
                                   </p:stCondLst>
@@ -6639,14 +6610,14 @@
                                           </p:stCondLst>
                                         </p:cTn>
                                         <p:tgtEl>
-                                          <p:spTgt spid="10"/>
+                                          <p:spTgt spid="15"/>
                                         </p:tgtEl>
                                         <p:attrNameLst>
                                           <p:attrName>style.visibility</p:attrName>
                                         </p:attrNameLst>
                                       </p:cBhvr>
                                       <p:to>
-                                        <p:strVal val="hidden"/>
+                                        <p:strVal val="visible"/>
                                       </p:to>
                                     </p:set>
                                   </p:childTnLst>
@@ -6680,12 +6651,11 @@
       </p:par>
     </p:tnLst>
     <p:bldLst>
-      <p:bldP spid="14" grpId="0" animBg="1"/>
-      <p:bldP spid="14" grpId="1" animBg="1"/>
-      <p:bldP spid="20" grpId="0" animBg="1"/>
-      <p:bldP spid="10" grpId="0" animBg="1"/>
-      <p:bldP spid="10" grpId="1" animBg="1"/>
-      <p:bldP spid="11" grpId="0" animBg="1"/>
+      <p:bldP spid="12" grpId="0" animBg="1"/>
+      <p:bldP spid="12" grpId="1" animBg="1"/>
+      <p:bldP spid="13" grpId="0" animBg="1"/>
+      <p:bldP spid="13" grpId="1" animBg="1"/>
+      <p:bldP spid="15" grpId="0" animBg="1"/>
     </p:bldLst>
   </p:timing>
 </p:sld>
@@ -6757,13 +6727,19 @@
             <p:spPr/>
             <p:txBody>
               <a:bodyPr>
-                <a:normAutofit fontScale="62500" lnSpcReduction="20000"/>
+                <a:normAutofit fontScale="55000" lnSpcReduction="20000"/>
               </a:bodyPr>
               <a:lstStyle/>
               <a:p>
                 <a:pPr marL="0" indent="0">
                   <a:buNone/>
                 </a:pPr>
+                <a:r>
+                  <a:rPr lang="en-MT" b="1" dirty="0"/>
+                  <a:t>Per Employee Cost Impact:</a:t>
+                </a:r>
+              </a:p>
+              <a:p>
                 <a:r>
                   <a:rPr lang="en-MT" b="1" dirty="0"/>
                   <a:t>Attrition Cost: </a:t>
@@ -6774,16 +6750,13 @@
                 </a:r>
               </a:p>
               <a:p>
-                <a:pPr marL="0" indent="0">
-                  <a:buNone/>
-                </a:pPr>
                 <a:r>
                   <a:rPr lang="en-MT" b="1" dirty="0"/>
                   <a:t>Intervention Cost:  </a:t>
                 </a:r>
                 <a:r>
                   <a:rPr lang="en-MT" dirty="0"/>
-                  <a:t>Quarterly Salary</a:t>
+                  <a:t>Two Months Salary</a:t>
                 </a:r>
                 <a:endParaRPr lang="en-MT" b="1" dirty="0"/>
               </a:p>
@@ -7144,7 +7117,7 @@
               <a:blipFill>
                 <a:blip r:embed="rId3"/>
                 <a:stretch>
-                  <a:fillRect l="-603" t="-2326"/>
+                  <a:fillRect l="-362" t="-1744"/>
                 </a:stretch>
               </a:blipFill>
             </p:spPr>
@@ -7212,7 +7185,7 @@
                                         <p:tgtEl>
                                           <p:spTgt spid="3">
                                             <p:txEl>
-                                              <p:pRg st="4" end="4"/>
+                                              <p:pRg st="5" end="5"/>
                                             </p:txEl>
                                           </p:spTgt>
                                         </p:tgtEl>
@@ -7261,7 +7234,7 @@
                                         <p:tgtEl>
                                           <p:spTgt spid="3">
                                             <p:txEl>
-                                              <p:pRg st="5" end="5"/>
+                                              <p:pRg st="6" end="6"/>
                                             </p:txEl>
                                           </p:spTgt>
                                         </p:tgtEl>
@@ -7310,7 +7283,7 @@
                                         <p:tgtEl>
                                           <p:spTgt spid="3">
                                             <p:txEl>
-                                              <p:pRg st="6" end="6"/>
+                                              <p:pRg st="7" end="7"/>
                                             </p:txEl>
                                           </p:spTgt>
                                         </p:tgtEl>
@@ -7359,7 +7332,7 @@
                                         <p:tgtEl>
                                           <p:spTgt spid="3">
                                             <p:txEl>
-                                              <p:pRg st="7" end="7"/>
+                                              <p:pRg st="8" end="8"/>
                                             </p:txEl>
                                           </p:spTgt>
                                         </p:tgtEl>
@@ -7408,7 +7381,7 @@
                                         <p:tgtEl>
                                           <p:spTgt spid="3">
                                             <p:txEl>
-                                              <p:pRg st="8" end="8"/>
+                                              <p:pRg st="9" end="9"/>
                                             </p:txEl>
                                           </p:spTgt>
                                         </p:tgtEl>
@@ -7457,7 +7430,7 @@
                                         <p:tgtEl>
                                           <p:spTgt spid="3">
                                             <p:txEl>
-                                              <p:pRg st="10" end="10"/>
+                                              <p:pRg st="11" end="11"/>
                                             </p:txEl>
                                           </p:spTgt>
                                         </p:tgtEl>
@@ -7506,7 +7479,7 @@
                                         <p:tgtEl>
                                           <p:spTgt spid="3">
                                             <p:txEl>
-                                              <p:pRg st="12" end="12"/>
+                                              <p:pRg st="13" end="13"/>
                                             </p:txEl>
                                           </p:spTgt>
                                         </p:tgtEl>
@@ -7575,118 +7548,12 @@
           <a:chExt cx="0" cy="0"/>
         </a:xfrm>
       </p:grpSpPr>
-      <p:sp>
-        <p:nvSpPr>
-          <p:cNvPr id="2" name="Title 1">
-            <a:extLst>
-              <a:ext uri="{FF2B5EF4-FFF2-40B4-BE49-F238E27FC236}">
-                <a16:creationId xmlns:a16="http://schemas.microsoft.com/office/drawing/2014/main" id="{ADCDC4C7-547F-951B-EDA0-AA2C981735AE}"/>
-              </a:ext>
-            </a:extLst>
-          </p:cNvPr>
-          <p:cNvSpPr>
-            <a:spLocks noGrp="1"/>
-          </p:cNvSpPr>
-          <p:nvPr>
-            <p:ph type="title"/>
-          </p:nvPr>
-        </p:nvSpPr>
-        <p:spPr/>
-        <p:txBody>
-          <a:bodyPr/>
-          <a:lstStyle/>
-          <a:p>
-            <a:r>
-              <a:rPr lang="en-MT" dirty="0"/>
-              <a:t>Evaluation</a:t>
-            </a:r>
-          </a:p>
-        </p:txBody>
-      </p:sp>
-      <p:sp>
-        <p:nvSpPr>
-          <p:cNvPr id="16" name="TextBox 15">
-            <a:extLst>
-              <a:ext uri="{FF2B5EF4-FFF2-40B4-BE49-F238E27FC236}">
-                <a16:creationId xmlns:a16="http://schemas.microsoft.com/office/drawing/2014/main" id="{904A3076-C301-0205-3531-E2C366AB5FE4}"/>
-              </a:ext>
-            </a:extLst>
-          </p:cNvPr>
-          <p:cNvSpPr txBox="1"/>
-          <p:nvPr/>
-        </p:nvSpPr>
-        <p:spPr>
-          <a:xfrm>
-            <a:off x="2878321" y="1303811"/>
-            <a:ext cx="2427890" cy="523220"/>
-          </a:xfrm>
-          <a:prstGeom prst="rect">
-            <a:avLst/>
-          </a:prstGeom>
-          <a:noFill/>
-        </p:spPr>
-        <p:txBody>
-          <a:bodyPr wrap="square" rtlCol="0">
-            <a:spAutoFit/>
-          </a:bodyPr>
-          <a:lstStyle/>
-          <a:p>
-            <a:r>
-              <a:rPr lang="en-MT" sz="2800" dirty="0"/>
-              <a:t>Na</a:t>
-            </a:r>
-            <a:r>
-              <a:rPr lang="en-GB" sz="2800" dirty="0" err="1"/>
-              <a:t>ï</a:t>
-            </a:r>
-            <a:r>
-              <a:rPr lang="en-MT" sz="2800" dirty="0"/>
-              <a:t>ve Bayes</a:t>
-            </a:r>
-          </a:p>
-        </p:txBody>
-      </p:sp>
-      <p:sp>
-        <p:nvSpPr>
-          <p:cNvPr id="17" name="TextBox 16">
-            <a:extLst>
-              <a:ext uri="{FF2B5EF4-FFF2-40B4-BE49-F238E27FC236}">
-                <a16:creationId xmlns:a16="http://schemas.microsoft.com/office/drawing/2014/main" id="{C5B87CB5-8623-62D5-8CAF-5F627362B4C9}"/>
-              </a:ext>
-            </a:extLst>
-          </p:cNvPr>
-          <p:cNvSpPr txBox="1"/>
-          <p:nvPr/>
-        </p:nvSpPr>
-        <p:spPr>
-          <a:xfrm>
-            <a:off x="7780448" y="1314607"/>
-            <a:ext cx="1099115" cy="523220"/>
-          </a:xfrm>
-          <a:prstGeom prst="rect">
-            <a:avLst/>
-          </a:prstGeom>
-          <a:noFill/>
-        </p:spPr>
-        <p:txBody>
-          <a:bodyPr wrap="square" rtlCol="0">
-            <a:spAutoFit/>
-          </a:bodyPr>
-          <a:lstStyle/>
-          <a:p>
-            <a:r>
-              <a:rPr lang="en-MT" sz="2800" dirty="0"/>
-              <a:t>K-NN</a:t>
-            </a:r>
-          </a:p>
-        </p:txBody>
-      </p:sp>
       <p:pic>
         <p:nvPicPr>
-          <p:cNvPr id="4" name="Picture 3" descr="A screenshot of a phone&#10;&#10;AI-generated content may be incorrect.">
-            <a:extLst>
-              <a:ext uri="{FF2B5EF4-FFF2-40B4-BE49-F238E27FC236}">
-                <a16:creationId xmlns:a16="http://schemas.microsoft.com/office/drawing/2014/main" id="{A37F4318-66A6-A93A-15AF-1F2934BFA614}"/>
+          <p:cNvPr id="5" name="Picture 4" descr="A screenshot of a phone&#10;&#10;AI-generated content may be incorrect.">
+            <a:extLst>
+              <a:ext uri="{FF2B5EF4-FFF2-40B4-BE49-F238E27FC236}">
+                <a16:creationId xmlns:a16="http://schemas.microsoft.com/office/drawing/2014/main" id="{2BCB30F8-3787-2D58-D6E0-75C6F55F1288}"/>
               </a:ext>
             </a:extLst>
           </p:cNvPr>
@@ -7703,8 +7570,8 @@
         </p:blipFill>
         <p:spPr>
           <a:xfrm>
-            <a:off x="1957820" y="1802972"/>
-            <a:ext cx="3783899" cy="4689903"/>
+            <a:off x="1980000" y="1980000"/>
+            <a:ext cx="3775909" cy="4680000"/>
           </a:xfrm>
           <a:prstGeom prst="rect">
             <a:avLst/>
@@ -7713,10 +7580,10 @@
       </p:pic>
       <p:pic>
         <p:nvPicPr>
-          <p:cNvPr id="7" name="Picture 6" descr="A screenshot of a phone&#10;&#10;AI-generated content may be incorrect.">
-            <a:extLst>
-              <a:ext uri="{FF2B5EF4-FFF2-40B4-BE49-F238E27FC236}">
-                <a16:creationId xmlns:a16="http://schemas.microsoft.com/office/drawing/2014/main" id="{5E532E1A-D9E9-DF2F-BD82-5CA80836A83F}"/>
+          <p:cNvPr id="8" name="Picture 7" descr="A screenshot of a phone&#10;&#10;AI-generated content may be incorrect.">
+            <a:extLst>
+              <a:ext uri="{FF2B5EF4-FFF2-40B4-BE49-F238E27FC236}">
+                <a16:creationId xmlns:a16="http://schemas.microsoft.com/office/drawing/2014/main" id="{F1429B0A-533A-DD19-56EB-2BD8CA5113B3}"/>
               </a:ext>
             </a:extLst>
           </p:cNvPr>
@@ -7733,8 +7600,8 @@
         </p:blipFill>
         <p:spPr>
           <a:xfrm>
-            <a:off x="6450281" y="1802972"/>
-            <a:ext cx="3783899" cy="4689903"/>
+            <a:off x="6609904" y="1980000"/>
+            <a:ext cx="3775909" cy="4680000"/>
           </a:xfrm>
           <a:prstGeom prst="rect">
             <a:avLst/>
@@ -7743,6 +7610,112 @@
       </p:pic>
       <p:sp>
         <p:nvSpPr>
+          <p:cNvPr id="2" name="Title 1">
+            <a:extLst>
+              <a:ext uri="{FF2B5EF4-FFF2-40B4-BE49-F238E27FC236}">
+                <a16:creationId xmlns:a16="http://schemas.microsoft.com/office/drawing/2014/main" id="{ADCDC4C7-547F-951B-EDA0-AA2C981735AE}"/>
+              </a:ext>
+            </a:extLst>
+          </p:cNvPr>
+          <p:cNvSpPr>
+            <a:spLocks noGrp="1"/>
+          </p:cNvSpPr>
+          <p:nvPr>
+            <p:ph type="title"/>
+          </p:nvPr>
+        </p:nvSpPr>
+        <p:spPr/>
+        <p:txBody>
+          <a:bodyPr/>
+          <a:lstStyle/>
+          <a:p>
+            <a:r>
+              <a:rPr lang="en-MT" dirty="0"/>
+              <a:t>Evaluation</a:t>
+            </a:r>
+          </a:p>
+        </p:txBody>
+      </p:sp>
+      <p:sp>
+        <p:nvSpPr>
+          <p:cNvPr id="16" name="TextBox 15">
+            <a:extLst>
+              <a:ext uri="{FF2B5EF4-FFF2-40B4-BE49-F238E27FC236}">
+                <a16:creationId xmlns:a16="http://schemas.microsoft.com/office/drawing/2014/main" id="{904A3076-C301-0205-3531-E2C366AB5FE4}"/>
+              </a:ext>
+            </a:extLst>
+          </p:cNvPr>
+          <p:cNvSpPr txBox="1"/>
+          <p:nvPr/>
+        </p:nvSpPr>
+        <p:spPr>
+          <a:xfrm>
+            <a:off x="2878321" y="1303811"/>
+            <a:ext cx="2427890" cy="523220"/>
+          </a:xfrm>
+          <a:prstGeom prst="rect">
+            <a:avLst/>
+          </a:prstGeom>
+          <a:noFill/>
+        </p:spPr>
+        <p:txBody>
+          <a:bodyPr wrap="square" rtlCol="0">
+            <a:spAutoFit/>
+          </a:bodyPr>
+          <a:lstStyle/>
+          <a:p>
+            <a:r>
+              <a:rPr lang="en-MT" sz="2800" dirty="0"/>
+              <a:t>Na</a:t>
+            </a:r>
+            <a:r>
+              <a:rPr lang="en-GB" sz="2800" dirty="0" err="1"/>
+              <a:t>ï</a:t>
+            </a:r>
+            <a:r>
+              <a:rPr lang="en-MT" sz="2800" dirty="0"/>
+              <a:t>ve Bayes</a:t>
+            </a:r>
+          </a:p>
+        </p:txBody>
+      </p:sp>
+      <p:sp>
+        <p:nvSpPr>
+          <p:cNvPr id="17" name="TextBox 16">
+            <a:extLst>
+              <a:ext uri="{FF2B5EF4-FFF2-40B4-BE49-F238E27FC236}">
+                <a16:creationId xmlns:a16="http://schemas.microsoft.com/office/drawing/2014/main" id="{C5B87CB5-8623-62D5-8CAF-5F627362B4C9}"/>
+              </a:ext>
+            </a:extLst>
+          </p:cNvPr>
+          <p:cNvSpPr txBox="1"/>
+          <p:nvPr/>
+        </p:nvSpPr>
+        <p:spPr>
+          <a:xfrm>
+            <a:off x="7780448" y="1314607"/>
+            <a:ext cx="1099115" cy="523220"/>
+          </a:xfrm>
+          <a:prstGeom prst="rect">
+            <a:avLst/>
+          </a:prstGeom>
+          <a:noFill/>
+        </p:spPr>
+        <p:txBody>
+          <a:bodyPr wrap="square" rtlCol="0">
+            <a:spAutoFit/>
+          </a:bodyPr>
+          <a:lstStyle/>
+          <a:p>
+            <a:r>
+              <a:rPr lang="en-MT" sz="2800" dirty="0"/>
+              <a:t>K-NN</a:t>
+            </a:r>
+          </a:p>
+        </p:txBody>
+      </p:sp>
+      <p:sp>
+        <p:nvSpPr>
           <p:cNvPr id="9" name="Rectangle 8">
             <a:extLst>
               <a:ext uri="{FF2B5EF4-FFF2-40B4-BE49-F238E27FC236}">
@@ -7755,8 +7728,8 @@
         </p:nvSpPr>
         <p:spPr>
           <a:xfrm>
-            <a:off x="4721351" y="2285999"/>
-            <a:ext cx="960992" cy="2052641"/>
+            <a:off x="4832938" y="2468563"/>
+            <a:ext cx="890649" cy="1957637"/>
           </a:xfrm>
           <a:prstGeom prst="rect">
             <a:avLst/>
@@ -7808,8 +7781,8 @@
         </p:nvSpPr>
         <p:spPr>
           <a:xfrm>
-            <a:off x="9273188" y="2285998"/>
-            <a:ext cx="960992" cy="2052641"/>
+            <a:off x="9488384" y="2402679"/>
+            <a:ext cx="852674" cy="2052641"/>
           </a:xfrm>
           <a:prstGeom prst="rect">
             <a:avLst/>
@@ -7861,8 +7834,8 @@
         </p:nvSpPr>
         <p:spPr>
           <a:xfrm>
-            <a:off x="4321467" y="4389437"/>
-            <a:ext cx="1360875" cy="2052641"/>
+            <a:off x="4321467" y="4579169"/>
+            <a:ext cx="1360875" cy="1957637"/>
           </a:xfrm>
           <a:prstGeom prst="rect">
             <a:avLst/>
@@ -7914,8 +7887,8 @@
         </p:nvSpPr>
         <p:spPr>
           <a:xfrm>
-            <a:off x="8796485" y="4338639"/>
-            <a:ext cx="1360875" cy="2052641"/>
+            <a:off x="9019309" y="4597493"/>
+            <a:ext cx="1235034" cy="1939313"/>
           </a:xfrm>
           <a:prstGeom prst="rect">
             <a:avLst/>
@@ -8269,72 +8242,38 @@
         <p:spPr/>
         <p:txBody>
           <a:bodyPr>
-            <a:normAutofit fontScale="92500" lnSpcReduction="10000"/>
+            <a:normAutofit/>
           </a:bodyPr>
           <a:lstStyle/>
           <a:p>
             <a:r>
               <a:rPr lang="en-GB" dirty="0"/>
-              <a:t>Naïve Bayes provided the most reliable predictions overall.</a:t>
+              <a:t>Naïve Bayes was a better fit for the dominant problem: high turnover in entry level jobs related to overtime and poor work-life balance</a:t>
             </a:r>
           </a:p>
           <a:p>
             <a:r>
               <a:rPr lang="en-GB" dirty="0"/>
-              <a:t>K-NN performed slightly better for certain higher-income groups, but results were less consistent.</a:t>
+              <a:t>K-NN had higher sensitivity across the board, but also lower specificity</a:t>
             </a:r>
           </a:p>
           <a:p>
             <a:r>
               <a:rPr lang="en-GB" dirty="0"/>
-              <a:t>A simple model like Naïve Bayes is easier to maintain as data changes next year.</a:t>
+              <a:t>Both models should be used going forward as baseline for future development</a:t>
             </a:r>
           </a:p>
           <a:p>
             <a:r>
               <a:rPr lang="en-GB" dirty="0"/>
-              <a:t>Interventions should focus on improving work-life balance and monitoring high-overtime roles.</a:t>
-            </a:r>
-          </a:p>
-          <a:p>
-            <a:r>
-              <a:rPr lang="en-GB" dirty="0" err="1"/>
-              <a:t>JobRole</a:t>
-            </a:r>
-            <a:r>
-              <a:rPr lang="en-GB" dirty="0"/>
-              <a:t>, </a:t>
-            </a:r>
-            <a:r>
-              <a:rPr lang="en-GB" dirty="0" err="1"/>
-              <a:t>WorkLifeBalance</a:t>
-            </a:r>
-            <a:r>
-              <a:rPr lang="en-GB" dirty="0"/>
-              <a:t>, </a:t>
-            </a:r>
-            <a:r>
-              <a:rPr lang="en-GB" dirty="0" err="1"/>
-              <a:t>OverTime</a:t>
-            </a:r>
-            <a:r>
-              <a:rPr lang="en-GB" dirty="0"/>
-              <a:t>, and </a:t>
-            </a:r>
-            <a:r>
-              <a:rPr lang="en-GB" dirty="0" err="1"/>
-              <a:t>MonthlyIncome</a:t>
-            </a:r>
-            <a:r>
-              <a:rPr lang="en-GB" dirty="0"/>
-              <a:t> were the strongest predictors of attrition</a:t>
-            </a:r>
-          </a:p>
-          <a:p>
-            <a:r>
-              <a:rPr lang="en-GB" dirty="0"/>
-              <a:t>Continued tracking and re-training will help ensure model accuracy over time.</a:t>
-            </a:r>
+              <a:t>Intervention should focus on the most prominent problems: overtime and work life balance</a:t>
+            </a:r>
+          </a:p>
+          <a:p>
+            <a:endParaRPr lang="en-GB" dirty="0"/>
+          </a:p>
+          <a:p>
+            <a:endParaRPr lang="en-GB" dirty="0"/>
           </a:p>
         </p:txBody>
       </p:sp>
@@ -8552,27 +8491,172 @@
                       </p:childTnLst>
                     </p:cTn>
                   </p:par>
+                </p:childTnLst>
+              </p:cTn>
+              <p:prevCondLst>
+                <p:cond evt="onPrev" delay="0">
+                  <p:tgtEl>
+                    <p:sldTgt/>
+                  </p:tgtEl>
+                </p:cond>
+              </p:prevCondLst>
+              <p:nextCondLst>
+                <p:cond evt="onNext" delay="0">
+                  <p:tgtEl>
+                    <p:sldTgt/>
+                  </p:tgtEl>
+                </p:cond>
+              </p:nextCondLst>
+            </p:seq>
+          </p:childTnLst>
+        </p:cTn>
+      </p:par>
+    </p:tnLst>
+  </p:timing>
+</p:sld>
+</file>
+
+<file path=ppt/slides/slide18.xml><?xml version="1.0" encoding="utf-8"?>
+<p:sld xmlns:a="http://schemas.openxmlformats.org/drawingml/2006/main" xmlns:r="http://schemas.openxmlformats.org/officeDocument/2006/relationships" xmlns:p="http://schemas.openxmlformats.org/presentationml/2006/main">
+  <p:cSld>
+    <p:spTree>
+      <p:nvGrpSpPr>
+        <p:cNvPr id="1" name="">
+          <a:extLst>
+            <a:ext uri="{FF2B5EF4-FFF2-40B4-BE49-F238E27FC236}">
+              <a16:creationId xmlns:a16="http://schemas.microsoft.com/office/drawing/2014/main" id="{2DA3086D-067A-1792-0820-DAFDB9A4831A}"/>
+            </a:ext>
+          </a:extLst>
+        </p:cNvPr>
+        <p:cNvGrpSpPr/>
+        <p:nvPr/>
+      </p:nvGrpSpPr>
+      <p:grpSpPr>
+        <a:xfrm>
+          <a:off x="0" y="0"/>
+          <a:ext cx="0" cy="0"/>
+          <a:chOff x="0" y="0"/>
+          <a:chExt cx="0" cy="0"/>
+        </a:xfrm>
+      </p:grpSpPr>
+      <p:sp>
+        <p:nvSpPr>
+          <p:cNvPr id="2" name="Title 1">
+            <a:extLst>
+              <a:ext uri="{FF2B5EF4-FFF2-40B4-BE49-F238E27FC236}">
+                <a16:creationId xmlns:a16="http://schemas.microsoft.com/office/drawing/2014/main" id="{F80960E8-4B68-FCF6-4245-E2437E8F1C34}"/>
+              </a:ext>
+            </a:extLst>
+          </p:cNvPr>
+          <p:cNvSpPr>
+            <a:spLocks noGrp="1"/>
+          </p:cNvSpPr>
+          <p:nvPr>
+            <p:ph type="title"/>
+          </p:nvPr>
+        </p:nvSpPr>
+        <p:spPr/>
+        <p:txBody>
+          <a:bodyPr/>
+          <a:lstStyle/>
+          <a:p>
+            <a:r>
+              <a:rPr lang="en-MT" dirty="0"/>
+              <a:t>Closing Remarks</a:t>
+            </a:r>
+          </a:p>
+        </p:txBody>
+      </p:sp>
+      <p:sp>
+        <p:nvSpPr>
+          <p:cNvPr id="3" name="Content Placeholder 2">
+            <a:extLst>
+              <a:ext uri="{FF2B5EF4-FFF2-40B4-BE49-F238E27FC236}">
+                <a16:creationId xmlns:a16="http://schemas.microsoft.com/office/drawing/2014/main" id="{15E48FCA-8399-89A8-FE56-1C7E9CBAC65B}"/>
+              </a:ext>
+            </a:extLst>
+          </p:cNvPr>
+          <p:cNvSpPr>
+            <a:spLocks noGrp="1"/>
+          </p:cNvSpPr>
+          <p:nvPr>
+            <p:ph idx="1"/>
+          </p:nvPr>
+        </p:nvSpPr>
+        <p:spPr/>
+        <p:txBody>
+          <a:bodyPr>
+            <a:normAutofit/>
+          </a:bodyPr>
+          <a:lstStyle/>
+          <a:p>
+            <a:r>
+              <a:rPr lang="en-GB" dirty="0"/>
+              <a:t>Naïve Bayes was a better fit for the dominant problem: high turnover in entry level jobs related to overtime and poor work-life balance</a:t>
+            </a:r>
+          </a:p>
+          <a:p>
+            <a:r>
+              <a:rPr lang="en-GB" dirty="0"/>
+              <a:t>K-NN had higher sensitivity across the board, but also lower specificity</a:t>
+            </a:r>
+          </a:p>
+          <a:p>
+            <a:r>
+              <a:rPr lang="en-GB" dirty="0"/>
+              <a:t>Both models should be used going forward as baseline for future development</a:t>
+            </a:r>
+          </a:p>
+          <a:p>
+            <a:r>
+              <a:rPr lang="en-GB" dirty="0"/>
+              <a:t>Intervention should focus on the most prominent problems: overtime and work life balance</a:t>
+            </a:r>
+          </a:p>
+          <a:p>
+            <a:endParaRPr lang="en-GB" dirty="0"/>
+          </a:p>
+        </p:txBody>
+      </p:sp>
+    </p:spTree>
+    <p:extLst>
+      <p:ext uri="{BB962C8B-B14F-4D97-AF65-F5344CB8AC3E}">
+        <p14:creationId xmlns:p14="http://schemas.microsoft.com/office/powerpoint/2010/main" val="3199729944"/>
+      </p:ext>
+    </p:extLst>
+  </p:cSld>
+  <p:clrMapOvr>
+    <a:masterClrMapping/>
+  </p:clrMapOvr>
+  <p:timing>
+    <p:tnLst>
+      <p:par>
+        <p:cTn id="1" dur="indefinite" restart="never" nodeType="tmRoot">
+          <p:childTnLst>
+            <p:seq concurrent="1" nextAc="seek">
+              <p:cTn id="2" dur="indefinite" nodeType="mainSeq">
+                <p:childTnLst>
                   <p:par>
-                    <p:cTn id="19" fill="hold">
+                    <p:cTn id="3" fill="hold">
                       <p:stCondLst>
                         <p:cond delay="indefinite"/>
                       </p:stCondLst>
                       <p:childTnLst>
                         <p:par>
-                          <p:cTn id="20" fill="hold">
+                          <p:cTn id="4" fill="hold">
                             <p:stCondLst>
                               <p:cond delay="0"/>
                             </p:stCondLst>
                             <p:childTnLst>
                               <p:par>
-                                <p:cTn id="21" presetID="1" presetClass="entr" presetSubtype="0" fill="hold" nodeType="clickEffect">
+                                <p:cTn id="5" presetID="1" presetClass="entr" presetSubtype="0" fill="hold" nodeType="clickEffect">
                                   <p:stCondLst>
                                     <p:cond delay="0"/>
                                   </p:stCondLst>
                                   <p:childTnLst>
                                     <p:set>
                                       <p:cBhvr>
-                                        <p:cTn id="22" dur="1" fill="hold">
+                                        <p:cTn id="6" dur="1" fill="hold">
                                           <p:stCondLst>
                                             <p:cond delay="0"/>
                                           </p:stCondLst>
@@ -8580,7 +8664,7 @@
                                         <p:tgtEl>
                                           <p:spTgt spid="3">
                                             <p:txEl>
-                                              <p:pRg st="4" end="4"/>
+                                              <p:pRg st="0" end="0"/>
                                             </p:txEl>
                                           </p:spTgt>
                                         </p:tgtEl>
@@ -8602,26 +8686,26 @@
                     </p:cTn>
                   </p:par>
                   <p:par>
-                    <p:cTn id="23" fill="hold">
+                    <p:cTn id="7" fill="hold">
                       <p:stCondLst>
                         <p:cond delay="indefinite"/>
                       </p:stCondLst>
                       <p:childTnLst>
                         <p:par>
-                          <p:cTn id="24" fill="hold">
+                          <p:cTn id="8" fill="hold">
                             <p:stCondLst>
                               <p:cond delay="0"/>
                             </p:stCondLst>
                             <p:childTnLst>
                               <p:par>
-                                <p:cTn id="25" presetID="1" presetClass="entr" presetSubtype="0" fill="hold" nodeType="clickEffect">
+                                <p:cTn id="9" presetID="1" presetClass="entr" presetSubtype="0" fill="hold" nodeType="clickEffect">
                                   <p:stCondLst>
                                     <p:cond delay="0"/>
                                   </p:stCondLst>
                                   <p:childTnLst>
                                     <p:set>
                                       <p:cBhvr>
-                                        <p:cTn id="26" dur="1" fill="hold">
+                                        <p:cTn id="10" dur="1" fill="hold">
                                           <p:stCondLst>
                                             <p:cond delay="0"/>
                                           </p:stCondLst>
@@ -8629,7 +8713,105 @@
                                         <p:tgtEl>
                                           <p:spTgt spid="3">
                                             <p:txEl>
-                                              <p:pRg st="5" end="5"/>
+                                              <p:pRg st="1" end="1"/>
+                                            </p:txEl>
+                                          </p:spTgt>
+                                        </p:tgtEl>
+                                        <p:attrNameLst>
+                                          <p:attrName>style.visibility</p:attrName>
+                                        </p:attrNameLst>
+                                      </p:cBhvr>
+                                      <p:to>
+                                        <p:strVal val="visible"/>
+                                      </p:to>
+                                    </p:set>
+                                  </p:childTnLst>
+                                </p:cTn>
+                              </p:par>
+                            </p:childTnLst>
+                          </p:cTn>
+                        </p:par>
+                      </p:childTnLst>
+                    </p:cTn>
+                  </p:par>
+                  <p:par>
+                    <p:cTn id="11" fill="hold">
+                      <p:stCondLst>
+                        <p:cond delay="indefinite"/>
+                      </p:stCondLst>
+                      <p:childTnLst>
+                        <p:par>
+                          <p:cTn id="12" fill="hold">
+                            <p:stCondLst>
+                              <p:cond delay="0"/>
+                            </p:stCondLst>
+                            <p:childTnLst>
+                              <p:par>
+                                <p:cTn id="13" presetID="1" presetClass="entr" presetSubtype="0" fill="hold" nodeType="clickEffect">
+                                  <p:stCondLst>
+                                    <p:cond delay="0"/>
+                                  </p:stCondLst>
+                                  <p:childTnLst>
+                                    <p:set>
+                                      <p:cBhvr>
+                                        <p:cTn id="14" dur="1" fill="hold">
+                                          <p:stCondLst>
+                                            <p:cond delay="0"/>
+                                          </p:stCondLst>
+                                        </p:cTn>
+                                        <p:tgtEl>
+                                          <p:spTgt spid="3">
+                                            <p:txEl>
+                                              <p:pRg st="2" end="2"/>
+                                            </p:txEl>
+                                          </p:spTgt>
+                                        </p:tgtEl>
+                                        <p:attrNameLst>
+                                          <p:attrName>style.visibility</p:attrName>
+                                        </p:attrNameLst>
+                                      </p:cBhvr>
+                                      <p:to>
+                                        <p:strVal val="visible"/>
+                                      </p:to>
+                                    </p:set>
+                                  </p:childTnLst>
+                                </p:cTn>
+                              </p:par>
+                            </p:childTnLst>
+                          </p:cTn>
+                        </p:par>
+                      </p:childTnLst>
+                    </p:cTn>
+                  </p:par>
+                  <p:par>
+                    <p:cTn id="15" fill="hold">
+                      <p:stCondLst>
+                        <p:cond delay="indefinite"/>
+                      </p:stCondLst>
+                      <p:childTnLst>
+                        <p:par>
+                          <p:cTn id="16" fill="hold">
+                            <p:stCondLst>
+                              <p:cond delay="0"/>
+                            </p:stCondLst>
+                            <p:childTnLst>
+                              <p:par>
+                                <p:cTn id="17" presetID="1" presetClass="entr" presetSubtype="0" fill="hold" nodeType="clickEffect">
+                                  <p:stCondLst>
+                                    <p:cond delay="0"/>
+                                  </p:stCondLst>
+                                  <p:childTnLst>
+                                    <p:set>
+                                      <p:cBhvr>
+                                        <p:cTn id="18" dur="1" fill="hold">
+                                          <p:stCondLst>
+                                            <p:cond delay="0"/>
+                                          </p:stCondLst>
+                                        </p:cTn>
+                                        <p:tgtEl>
+                                          <p:spTgt spid="3">
+                                            <p:txEl>
+                                              <p:pRg st="3" end="3"/>
                                             </p:txEl>
                                           </p:spTgt>
                                         </p:tgtEl>
@@ -9069,8 +9251,8 @@
           </a:prstGeom>
         </p:spPr>
       </p:pic>
-      <mc:AlternateContent xmlns:mc="http://schemas.openxmlformats.org/markup-compatibility/2006">
-        <mc:Choice xmlns:a14="http://schemas.microsoft.com/office/drawing/2010/main" Requires="a14">
+      <mc:AlternateContent xmlns:mc="http://schemas.openxmlformats.org/markup-compatibility/2006" xmlns:a14="http://schemas.microsoft.com/office/drawing/2010/main">
+        <mc:Choice Requires="a14">
           <p:sp>
             <p:nvSpPr>
               <p:cNvPr id="3" name="TextBox 2">
@@ -9235,7 +9417,7 @@
             </p:txBody>
           </p:sp>
         </mc:Choice>
-        <mc:Fallback>
+        <mc:Fallback xmlns="">
           <p:sp>
             <p:nvSpPr>
               <p:cNvPr id="3" name="TextBox 2">
@@ -11343,6 +11525,36 @@
           <a:chExt cx="0" cy="0"/>
         </a:xfrm>
       </p:grpSpPr>
+      <p:pic>
+        <p:nvPicPr>
+          <p:cNvPr id="8" name="Picture 7" descr="A graph with red dots&#10;&#10;AI-generated content may be incorrect.">
+            <a:extLst>
+              <a:ext uri="{FF2B5EF4-FFF2-40B4-BE49-F238E27FC236}">
+                <a16:creationId xmlns:a16="http://schemas.microsoft.com/office/drawing/2014/main" id="{306F8D95-D48C-1929-48B5-552F916BCA6F}"/>
+              </a:ext>
+            </a:extLst>
+          </p:cNvPr>
+          <p:cNvPicPr>
+            <a:picLocks noChangeAspect="1"/>
+          </p:cNvPicPr>
+          <p:nvPr/>
+        </p:nvPicPr>
+        <p:blipFill>
+          <a:blip r:embed="rId3"/>
+          <a:stretch>
+            <a:fillRect/>
+          </a:stretch>
+        </p:blipFill>
+        <p:spPr>
+          <a:xfrm>
+            <a:off x="562444" y="365125"/>
+            <a:ext cx="5474298" cy="5474298"/>
+          </a:xfrm>
+          <a:prstGeom prst="rect">
+            <a:avLst/>
+          </a:prstGeom>
+        </p:spPr>
+      </p:pic>
       <p:sp>
         <p:nvSpPr>
           <p:cNvPr id="2" name="Title 1">
@@ -11434,7 +11646,7 @@
         <p:spPr>
           <a:xfrm>
             <a:off x="6389370" y="1931670"/>
-            <a:ext cx="4834890" cy="3416320"/>
+            <a:ext cx="4834890" cy="923330"/>
           </a:xfrm>
           <a:prstGeom prst="rect">
             <a:avLst/>
@@ -11453,114 +11665,23 @@
             </a:r>
             <a:endParaRPr lang="en-MT" dirty="0"/>
           </a:p>
-          <a:p>
-            <a:endParaRPr lang="en-MT" dirty="0"/>
-          </a:p>
-          <a:p>
-            <a:r>
-              <a:rPr lang="en-MT" dirty="0">
-                <a:solidFill>
-                  <a:srgbClr val="C00000"/>
-                </a:solidFill>
-              </a:rPr>
-              <a:t>Below Expected Income</a:t>
-            </a:r>
-          </a:p>
-          <a:p>
-            <a:pPr marL="285750" indent="-285750">
-              <a:buFont typeface="Arial" panose="020B0604020202020204" pitchFamily="34" charset="0"/>
-              <a:buChar char="•"/>
-            </a:pPr>
-            <a:r>
-              <a:rPr lang="en-MT" dirty="0"/>
-              <a:t>The Attrition rate is higher across all job levels</a:t>
-            </a:r>
-          </a:p>
-          <a:p>
-            <a:pPr marL="285750" indent="-285750">
-              <a:buFont typeface="Arial" panose="020B0604020202020204" pitchFamily="34" charset="0"/>
-              <a:buChar char="•"/>
-            </a:pPr>
-            <a:endParaRPr lang="en-MT" dirty="0"/>
-          </a:p>
-          <a:p>
-            <a:r>
-              <a:rPr lang="en-MT" dirty="0">
-                <a:solidFill>
-                  <a:schemeClr val="accent3">
-                    <a:lumMod val="75000"/>
-                  </a:schemeClr>
-                </a:solidFill>
-              </a:rPr>
-              <a:t>Above Expected Income</a:t>
-            </a:r>
-          </a:p>
-          <a:p>
-            <a:pPr marL="285750" indent="-285750">
-              <a:buFont typeface="Arial" panose="020B0604020202020204" pitchFamily="34" charset="0"/>
-              <a:buChar char="•"/>
-            </a:pPr>
-            <a:r>
-              <a:rPr lang="en-MT" dirty="0"/>
-              <a:t>Attrition rate is comparable to “Around Expected” for Entry and Junior</a:t>
-            </a:r>
-          </a:p>
-          <a:p>
-            <a:pPr marL="285750" indent="-285750">
-              <a:buFont typeface="Arial" panose="020B0604020202020204" pitchFamily="34" charset="0"/>
-              <a:buChar char="•"/>
-            </a:pPr>
-            <a:r>
-              <a:rPr lang="en-MT" dirty="0"/>
-              <a:t>Attrition rate is lower for Mid and Senior</a:t>
-            </a:r>
-          </a:p>
-        </p:txBody>
-      </p:sp>
-      <p:pic>
-        <p:nvPicPr>
-          <p:cNvPr id="28" name="Content Placeholder 27" descr="A graph with numbers and a chart with numbers and a graph with numbers&#10;&#10;AI-generated content may be incorrect.">
-            <a:extLst>
-              <a:ext uri="{FF2B5EF4-FFF2-40B4-BE49-F238E27FC236}">
-                <a16:creationId xmlns:a16="http://schemas.microsoft.com/office/drawing/2014/main" id="{53F52B10-A766-2789-F635-04AD26F32228}"/>
-              </a:ext>
-            </a:extLst>
-          </p:cNvPr>
-          <p:cNvPicPr>
-            <a:picLocks noGrp="1" noChangeAspect="1"/>
-          </p:cNvPicPr>
-          <p:nvPr>
-            <p:ph idx="1"/>
-          </p:nvPr>
-        </p:nvPicPr>
-        <p:blipFill>
-          <a:blip r:embed="rId3"/>
-          <a:stretch>
-            <a:fillRect/>
-          </a:stretch>
-        </p:blipFill>
+        </p:txBody>
+      </p:sp>
+      <p:sp>
+        <p:nvSpPr>
+          <p:cNvPr id="16" name="TextBox 15">
+            <a:extLst>
+              <a:ext uri="{FF2B5EF4-FFF2-40B4-BE49-F238E27FC236}">
+                <a16:creationId xmlns:a16="http://schemas.microsoft.com/office/drawing/2014/main" id="{1C42D22F-48A2-B3F6-9533-477D3DA44019}"/>
+              </a:ext>
+            </a:extLst>
+          </p:cNvPr>
+          <p:cNvSpPr txBox="1"/>
+          <p:nvPr/>
+        </p:nvSpPr>
         <p:spPr>
           <a:xfrm>
-            <a:off x="260666" y="153768"/>
-            <a:ext cx="5572661" cy="5572661"/>
-          </a:xfrm>
-        </p:spPr>
-      </p:pic>
-      <p:sp>
-        <p:nvSpPr>
-          <p:cNvPr id="16" name="TextBox 15">
-            <a:extLst>
-              <a:ext uri="{FF2B5EF4-FFF2-40B4-BE49-F238E27FC236}">
-                <a16:creationId xmlns:a16="http://schemas.microsoft.com/office/drawing/2014/main" id="{1C42D22F-48A2-B3F6-9533-477D3DA44019}"/>
-              </a:ext>
-            </a:extLst>
-          </p:cNvPr>
-          <p:cNvSpPr txBox="1"/>
-          <p:nvPr/>
-        </p:nvSpPr>
-        <p:spPr>
-          <a:xfrm>
-            <a:off x="3299593" y="1027906"/>
+            <a:off x="3299593" y="2194633"/>
             <a:ext cx="1764030" cy="369332"/>
           </a:xfrm>
           <a:prstGeom prst="rect">
@@ -11607,7 +11728,7 @@
         </p:nvSpPr>
         <p:spPr>
           <a:xfrm>
-            <a:off x="3299593" y="492839"/>
+            <a:off x="3299593" y="1187546"/>
             <a:ext cx="1764030" cy="369332"/>
           </a:xfrm>
           <a:prstGeom prst="rect">
@@ -11642,107 +11763,40 @@
       </p:sp>
       <p:sp>
         <p:nvSpPr>
-          <p:cNvPr id="33" name="Rectangle 32">
-            <a:extLst>
-              <a:ext uri="{FF2B5EF4-FFF2-40B4-BE49-F238E27FC236}">
-                <a16:creationId xmlns:a16="http://schemas.microsoft.com/office/drawing/2014/main" id="{0A8371AD-0E22-7E0F-886D-B51C4A756D65}"/>
-              </a:ext>
-            </a:extLst>
-          </p:cNvPr>
-          <p:cNvSpPr/>
+          <p:cNvPr id="9" name="TextBox 8">
+            <a:extLst>
+              <a:ext uri="{FF2B5EF4-FFF2-40B4-BE49-F238E27FC236}">
+                <a16:creationId xmlns:a16="http://schemas.microsoft.com/office/drawing/2014/main" id="{BA2EE45F-5020-4018-648C-3EEF4DF96E0F}"/>
+              </a:ext>
+            </a:extLst>
+          </p:cNvPr>
+          <p:cNvSpPr txBox="1"/>
           <p:nvPr/>
         </p:nvSpPr>
         <p:spPr>
           <a:xfrm>
-            <a:off x="1114674" y="3283527"/>
-            <a:ext cx="1290080" cy="1434777"/>
+            <a:off x="3217339" y="1655012"/>
+            <a:ext cx="1928537" cy="369332"/>
           </a:xfrm>
           <a:prstGeom prst="rect">
             <a:avLst/>
           </a:prstGeom>
           <a:noFill/>
-          <a:ln>
-            <a:solidFill>
-              <a:srgbClr val="FF0000"/>
-            </a:solidFill>
-            <a:prstDash val="dash"/>
-          </a:ln>
         </p:spPr>
-        <p:style>
-          <a:lnRef idx="2">
-            <a:schemeClr val="accent1">
-              <a:shade val="15000"/>
-            </a:schemeClr>
-          </a:lnRef>
-          <a:fillRef idx="1">
-            <a:schemeClr val="accent1"/>
-          </a:fillRef>
-          <a:effectRef idx="0">
-            <a:schemeClr val="accent1"/>
-          </a:effectRef>
-          <a:fontRef idx="minor">
-            <a:schemeClr val="lt1"/>
-          </a:fontRef>
-        </p:style>
-        <p:txBody>
-          <a:bodyPr rtlCol="0" anchor="ctr"/>
+        <p:txBody>
+          <a:bodyPr wrap="square" rtlCol="0">
+            <a:spAutoFit/>
+          </a:bodyPr>
           <a:lstStyle/>
           <a:p>
-            <a:pPr algn="ctr"/>
-            <a:endParaRPr lang="en-MT"/>
-          </a:p>
-        </p:txBody>
-      </p:sp>
-      <p:sp>
-        <p:nvSpPr>
-          <p:cNvPr id="34" name="Rectangle 33">
-            <a:extLst>
-              <a:ext uri="{FF2B5EF4-FFF2-40B4-BE49-F238E27FC236}">
-                <a16:creationId xmlns:a16="http://schemas.microsoft.com/office/drawing/2014/main" id="{19BB0E02-C8F6-017E-00FD-5932E9A4A488}"/>
-              </a:ext>
-            </a:extLst>
-          </p:cNvPr>
-          <p:cNvSpPr/>
-          <p:nvPr/>
-        </p:nvSpPr>
-        <p:spPr>
-          <a:xfrm>
-            <a:off x="2432070" y="3990109"/>
-            <a:ext cx="2377436" cy="680605"/>
-          </a:xfrm>
-          <a:prstGeom prst="rect">
-            <a:avLst/>
-          </a:prstGeom>
-          <a:noFill/>
-          <a:ln>
-            <a:solidFill>
-              <a:srgbClr val="FF0000"/>
-            </a:solidFill>
-            <a:prstDash val="dash"/>
-          </a:ln>
-        </p:spPr>
-        <p:style>
-          <a:lnRef idx="2">
-            <a:schemeClr val="accent1">
-              <a:shade val="15000"/>
-            </a:schemeClr>
-          </a:lnRef>
-          <a:fillRef idx="1">
-            <a:schemeClr val="accent1"/>
-          </a:fillRef>
-          <a:effectRef idx="0">
-            <a:schemeClr val="accent1"/>
-          </a:effectRef>
-          <a:fontRef idx="minor">
-            <a:schemeClr val="lt1"/>
-          </a:fontRef>
-        </p:style>
-        <p:txBody>
-          <a:bodyPr rtlCol="0" anchor="ctr"/>
-          <a:lstStyle/>
-          <a:p>
-            <a:pPr algn="ctr"/>
-            <a:endParaRPr lang="en-MT"/>
+            <a:r>
+              <a:rPr lang="en-GB" dirty="0"/>
+              <a:t>Around</a:t>
+            </a:r>
+            <a:r>
+              <a:rPr lang="en-MT" dirty="0"/>
+              <a:t> Expected</a:t>
+            </a:r>
           </a:p>
         </p:txBody>
       </p:sp>
@@ -11780,7 +11834,7 @@
                             </p:stCondLst>
                             <p:childTnLst>
                               <p:par>
-                                <p:cTn id="5" presetID="1" presetClass="entr" presetSubtype="0" fill="hold" nodeType="clickEffect">
+                                <p:cTn id="5" presetID="1" presetClass="entr" presetSubtype="0" fill="hold" grpId="0" nodeType="clickEffect">
                                   <p:stCondLst>
                                     <p:cond delay="0"/>
                                   </p:stCondLst>
@@ -11793,11 +11847,7 @@
                                           </p:stCondLst>
                                         </p:cTn>
                                         <p:tgtEl>
-                                          <p:spTgt spid="14">
-                                            <p:txEl>
-                                              <p:pRg st="2" end="2"/>
-                                            </p:txEl>
-                                          </p:spTgt>
+                                          <p:spTgt spid="15"/>
                                         </p:tgtEl>
                                         <p:attrNameLst>
                                           <p:attrName>style.visibility</p:attrName>
@@ -11811,7 +11861,7 @@
                                 </p:cTn>
                               </p:par>
                               <p:par>
-                                <p:cTn id="7" presetID="1" presetClass="entr" presetSubtype="0" fill="hold" nodeType="withEffect">
+                                <p:cTn id="7" presetID="1" presetClass="entr" presetSubtype="0" fill="hold" grpId="0" nodeType="withEffect">
                                   <p:stCondLst>
                                     <p:cond delay="0"/>
                                   </p:stCondLst>
@@ -11824,11 +11874,7 @@
                                           </p:stCondLst>
                                         </p:cTn>
                                         <p:tgtEl>
-                                          <p:spTgt spid="14">
-                                            <p:txEl>
-                                              <p:pRg st="3" end="3"/>
-                                            </p:txEl>
-                                          </p:spTgt>
+                                          <p:spTgt spid="9"/>
                                         </p:tgtEl>
                                         <p:attrNameLst>
                                           <p:attrName>style.visibility</p:attrName>
@@ -11855,172 +11901,7 @@
                                           </p:stCondLst>
                                         </p:cTn>
                                         <p:tgtEl>
-                                          <p:spTgt spid="33"/>
-                                        </p:tgtEl>
-                                        <p:attrNameLst>
-                                          <p:attrName>style.visibility</p:attrName>
-                                        </p:attrNameLst>
-                                      </p:cBhvr>
-                                      <p:to>
-                                        <p:strVal val="visible"/>
-                                      </p:to>
-                                    </p:set>
-                                  </p:childTnLst>
-                                </p:cTn>
-                              </p:par>
-                            </p:childTnLst>
-                          </p:cTn>
-                        </p:par>
-                      </p:childTnLst>
-                    </p:cTn>
-                  </p:par>
-                  <p:par>
-                    <p:cTn id="11" fill="hold">
-                      <p:stCondLst>
-                        <p:cond delay="indefinite"/>
-                      </p:stCondLst>
-                      <p:childTnLst>
-                        <p:par>
-                          <p:cTn id="12" fill="hold">
-                            <p:stCondLst>
-                              <p:cond delay="0"/>
-                            </p:stCondLst>
-                            <p:childTnLst>
-                              <p:par>
-                                <p:cTn id="13" presetID="1" presetClass="entr" presetSubtype="0" fill="hold" nodeType="clickEffect">
-                                  <p:stCondLst>
-                                    <p:cond delay="0"/>
-                                  </p:stCondLst>
-                                  <p:childTnLst>
-                                    <p:set>
-                                      <p:cBhvr>
-                                        <p:cTn id="14" dur="1" fill="hold">
-                                          <p:stCondLst>
-                                            <p:cond delay="0"/>
-                                          </p:stCondLst>
-                                        </p:cTn>
-                                        <p:tgtEl>
-                                          <p:spTgt spid="14">
-                                            <p:txEl>
-                                              <p:pRg st="5" end="5"/>
-                                            </p:txEl>
-                                          </p:spTgt>
-                                        </p:tgtEl>
-                                        <p:attrNameLst>
-                                          <p:attrName>style.visibility</p:attrName>
-                                        </p:attrNameLst>
-                                      </p:cBhvr>
-                                      <p:to>
-                                        <p:strVal val="visible"/>
-                                      </p:to>
-                                    </p:set>
-                                  </p:childTnLst>
-                                </p:cTn>
-                              </p:par>
-                              <p:par>
-                                <p:cTn id="15" presetID="1" presetClass="entr" presetSubtype="0" fill="hold" nodeType="withEffect">
-                                  <p:stCondLst>
-                                    <p:cond delay="0"/>
-                                  </p:stCondLst>
-                                  <p:childTnLst>
-                                    <p:set>
-                                      <p:cBhvr>
-                                        <p:cTn id="16" dur="1" fill="hold">
-                                          <p:stCondLst>
-                                            <p:cond delay="0"/>
-                                          </p:stCondLst>
-                                        </p:cTn>
-                                        <p:tgtEl>
-                                          <p:spTgt spid="14">
-                                            <p:txEl>
-                                              <p:pRg st="6" end="6"/>
-                                            </p:txEl>
-                                          </p:spTgt>
-                                        </p:tgtEl>
-                                        <p:attrNameLst>
-                                          <p:attrName>style.visibility</p:attrName>
-                                        </p:attrNameLst>
-                                      </p:cBhvr>
-                                      <p:to>
-                                        <p:strVal val="visible"/>
-                                      </p:to>
-                                    </p:set>
-                                  </p:childTnLst>
-                                </p:cTn>
-                              </p:par>
-                              <p:par>
-                                <p:cTn id="17" presetID="1" presetClass="entr" presetSubtype="0" fill="hold" nodeType="withEffect">
-                                  <p:stCondLst>
-                                    <p:cond delay="0"/>
-                                  </p:stCondLst>
-                                  <p:childTnLst>
-                                    <p:set>
-                                      <p:cBhvr>
-                                        <p:cTn id="18" dur="1" fill="hold">
-                                          <p:stCondLst>
-                                            <p:cond delay="0"/>
-                                          </p:stCondLst>
-                                        </p:cTn>
-                                        <p:tgtEl>
-                                          <p:spTgt spid="14">
-                                            <p:txEl>
-                                              <p:pRg st="7" end="7"/>
-                                            </p:txEl>
-                                          </p:spTgt>
-                                        </p:tgtEl>
-                                        <p:attrNameLst>
-                                          <p:attrName>style.visibility</p:attrName>
-                                        </p:attrNameLst>
-                                      </p:cBhvr>
-                                      <p:to>
-                                        <p:strVal val="visible"/>
-                                      </p:to>
-                                    </p:set>
-                                  </p:childTnLst>
-                                </p:cTn>
-                              </p:par>
-                              <p:par>
-                                <p:cTn id="19" presetID="1" presetClass="exit" presetSubtype="0" fill="hold" grpId="1" nodeType="withEffect">
-                                  <p:stCondLst>
-                                    <p:cond delay="0"/>
-                                  </p:stCondLst>
-                                  <p:childTnLst>
-                                    <p:set>
-                                      <p:cBhvr>
-                                        <p:cTn id="20" dur="1" fill="hold">
-                                          <p:stCondLst>
-                                            <p:cond delay="0"/>
-                                          </p:stCondLst>
-                                        </p:cTn>
-                                        <p:tgtEl>
-                                          <p:spTgt spid="33"/>
-                                        </p:tgtEl>
-                                        <p:attrNameLst>
-                                          <p:attrName>style.visibility</p:attrName>
-                                        </p:attrNameLst>
-                                      </p:cBhvr>
-                                      <p:to>
-                                        <p:strVal val="hidden"/>
-                                      </p:to>
-                                    </p:set>
-                                  </p:childTnLst>
-                                </p:cTn>
-                              </p:par>
-                              <p:par>
-                                <p:cTn id="21" presetID="1" presetClass="entr" presetSubtype="0" fill="hold" grpId="0" nodeType="withEffect">
-                                  <p:stCondLst>
-                                    <p:cond delay="0"/>
-                                  </p:stCondLst>
-                                  <p:childTnLst>
-                                    <p:set>
-                                      <p:cBhvr>
-                                        <p:cTn id="22" dur="1" fill="hold">
-                                          <p:stCondLst>
-                                            <p:cond delay="0"/>
-                                          </p:stCondLst>
-                                        </p:cTn>
-                                        <p:tgtEl>
-                                          <p:spTgt spid="34"/>
+                                          <p:spTgt spid="16"/>
                                         </p:tgtEl>
                                         <p:attrNameLst>
                                           <p:attrName>style.visibility</p:attrName>
@@ -12061,9 +11942,9 @@
       </p:par>
     </p:tnLst>
     <p:bldLst>
-      <p:bldP spid="33" grpId="0" animBg="1"/>
-      <p:bldP spid="33" grpId="1" animBg="1"/>
-      <p:bldP spid="34" grpId="0" animBg="1"/>
+      <p:bldP spid="16" grpId="0"/>
+      <p:bldP spid="15" grpId="0"/>
+      <p:bldP spid="9" grpId="0"/>
     </p:bldLst>
   </p:timing>
 </p:sld>
@@ -12125,7 +12006,7 @@
 
 <file path=ppt/tags/tag7.xml><?xml version="1.0" encoding="utf-8"?>
 <p:tagLst xmlns:a="http://schemas.openxmlformats.org/drawingml/2006/main" xmlns:r="http://schemas.openxmlformats.org/officeDocument/2006/relationships" xmlns:p="http://schemas.openxmlformats.org/presentationml/2006/main">
-  <p:tag name="TIMING" val="|6.2|9.1|6.6"/>
+  <p:tag name="TIMING" val="|13.5|9.8"/>
 </p:tagLst>
 </file>
 
